--- a/public/fun/pack/pptx/review/보장점검양식_41_본인점검_아랫목.pptx
+++ b/public/fun/pack/pptx/review/보장점검양식_41_본인점검_아랫목.pptx
@@ -3286,6 +3286,14 @@
 <file path=ppt/slides/slide1.xml><?xml version="1.0" encoding="utf-8"?>
 <p:sld xmlns:a="http://schemas.openxmlformats.org/drawingml/2006/main" xmlns:p="http://schemas.openxmlformats.org/presentationml/2006/main" xmlns:r="http://schemas.openxmlformats.org/officeDocument/2006/relationships">
   <p:cSld>
+    <p:bg>
+      <p:bgPr>
+        <a:solidFill>
+          <a:srgbClr val="493027"/>
+        </a:solidFill>
+        <a:effectLst/>
+      </p:bgPr>
+    </p:bg>
     <p:spTree>
       <p:nvGrpSpPr>
         <p:cNvPr id="1" name=""/>
@@ -3293,30 +3301,105 @@
         <p:nvPr/>
       </p:nvGrpSpPr>
       <p:grpSpPr/>
-      <p:pic>
-        <p:nvPicPr>
-          <p:cNvPr id="3" name="표지 그림" descr="review-41.jpg"/>
-          <p:cNvPicPr>
-            <a:picLocks noChangeAspect="1"/>
-          </p:cNvPicPr>
+      <p:sp>
+        <p:nvSpPr>
+          <p:cNvPr id="3" name="장식"/>
+          <p:cNvSpPr/>
           <p:nvPr/>
-        </p:nvPicPr>
-        <p:blipFill>
-          <a:blip r:embed="rId2"/>
-          <a:stretch>
-            <a:fillRect/>
-          </a:stretch>
-        </p:blipFill>
-        <p:spPr>
-          <a:xfrm>
-            <a:off x="0" y="0"/>
-            <a:ext cx="12191695" cy="6858000"/>
+        </p:nvSpPr>
+        <p:spPr>
+          <a:xfrm>
+            <a:off x="1463003" y="685800"/>
+            <a:ext cx="3169840" cy="5486400"/>
+          </a:xfrm>
+          <a:prstGeom prst="round2SameRect">
+            <a:avLst>
+              <a:gd name="adj1" fmla="val 50000"/>
+              <a:gd name="adj2" fmla="val 0"/>
+            </a:avLst>
+          </a:prstGeom>
+          <a:solidFill>
+            <a:srgbClr val="E1AC98"/>
+          </a:solidFill>
+          <a:ln>
+            <a:noFill/>
+          </a:ln>
+        </p:spPr>
+        <p:txBody>
+          <a:bodyPr rtlCol="0" anchor="ctr"/>
+          <a:lstStyle/>
+          <a:p>
+            <a:pPr algn="ctr"/>
+          </a:p>
+        </p:txBody>
+      </p:sp>
+      <p:sp>
+        <p:nvSpPr>
+          <p:cNvPr id="4" name="장식"/>
+          <p:cNvSpPr/>
+          <p:nvPr/>
+        </p:nvSpPr>
+        <p:spPr>
+          <a:xfrm>
+            <a:off x="4358505" y="4251960"/>
+            <a:ext cx="1005840" cy="1005840"/>
+          </a:xfrm>
+          <a:prstGeom prst="ellipse">
+            <a:avLst/>
+          </a:prstGeom>
+          <a:solidFill>
+            <a:srgbClr val="AC8170"/>
+          </a:solidFill>
+          <a:ln>
+            <a:noFill/>
+          </a:ln>
+        </p:spPr>
+        <p:txBody>
+          <a:bodyPr rtlCol="0" anchor="ctr"/>
+          <a:lstStyle/>
+          <a:p>
+            <a:pPr algn="ctr"/>
+          </a:p>
+        </p:txBody>
+      </p:sp>
+      <p:sp>
+        <p:nvSpPr>
+          <p:cNvPr id="5" name="라벨"/>
+          <p:cNvSpPr txBox="1"/>
+          <p:nvPr/>
+        </p:nvSpPr>
+        <p:spPr>
+          <a:xfrm>
+            <a:off x="6827349" y="2148840"/>
+            <a:ext cx="4632844" cy="274320"/>
           </a:xfrm>
           <a:prstGeom prst="rect">
             <a:avLst/>
           </a:prstGeom>
-        </p:spPr>
-      </p:pic>
+          <a:noFill/>
+        </p:spPr>
+        <p:txBody>
+          <a:bodyPr wrap="square" lIns="54864" rIns="54864" tIns="27432" bIns="27432" anchor="t">
+            <a:noAutofit/>
+          </a:bodyPr>
+          <a:lstStyle/>
+          <a:p>
+            <a:pPr algn="l">
+              <a:lnSpc>
+                <a:spcPct val="115000"/>
+              </a:lnSpc>
+            </a:pPr>
+            <a:r>
+              <a:rPr sz="1000" b="1" i="0" spc="250">
+                <a:solidFill>
+                  <a:srgbClr val="FFFFFF"/>
+                </a:solidFill>
+              </a:rPr>
+              <a:t>INSURANCE CHECK</a:t>
+            </a:r>
+          </a:p>
+        </p:txBody>
+      </p:sp>
       <p:sp>
         <p:nvSpPr>
           <p:cNvPr id="2" name="Title 1"/>
@@ -3329,8 +3412,8 @@
         </p:nvSpPr>
         <p:spPr>
           <a:xfrm>
-            <a:off x="853418" y="2057400"/>
-            <a:ext cx="6095847" cy="1554480"/>
+            <a:off x="6827349" y="2606040"/>
+            <a:ext cx="4632844" cy="1188720"/>
           </a:xfrm>
         </p:spPr>
         <p:txBody>
@@ -3347,7 +3430,7 @@
             <a:r>
               <a:rPr sz="3600" b="1" i="0">
                 <a:solidFill>
-                  <a:srgbClr val="3B2017"/>
+                  <a:srgbClr val="FFFFFF"/>
                 </a:solidFill>
               </a:rPr>
               <a:t>우리 보험 점검 시간</a:t>
@@ -3357,14 +3440,14 @@
       </p:sp>
       <p:sp>
         <p:nvSpPr>
-          <p:cNvPr id="4" name="한 줄 문구"/>
+          <p:cNvPr id="6" name="한 줄 문구"/>
           <p:cNvSpPr txBox="1"/>
           <p:nvPr/>
         </p:nvSpPr>
         <p:spPr>
           <a:xfrm>
-            <a:off x="853418" y="3749039"/>
-            <a:ext cx="6095847" cy="822960"/>
+            <a:off x="6827349" y="3886200"/>
+            <a:ext cx="4632844" cy="822960"/>
           </a:xfrm>
           <a:prstGeom prst="rect">
             <a:avLst/>
@@ -3383,26 +3466,26 @@
               </a:lnSpc>
             </a:pPr>
             <a:r>
-              <a:rPr sz="1700" b="0" i="1">
+              <a:rPr sz="1700" b="0" i="0">
                 <a:solidFill>
-                  <a:srgbClr val="3B2017"/>
+                  <a:srgbClr val="FFFFFF"/>
                 </a:solidFill>
               </a:rPr>
-              <a:t>새해에는 한 번 정리하고 시작합니다</a:t>
-            </a:r>
-          </a:p>
-        </p:txBody>
-      </p:sp>
-      <p:sp>
-        <p:nvSpPr>
-          <p:cNvPr id="5" name="안내 문구"/>
+              <a:t>한 번 정리하고 시작합니다</a:t>
+            </a:r>
+          </a:p>
+        </p:txBody>
+      </p:sp>
+      <p:sp>
+        <p:nvSpPr>
+          <p:cNvPr id="7" name="안내 문구"/>
           <p:cNvSpPr txBox="1"/>
           <p:nvPr/>
         </p:nvSpPr>
         <p:spPr>
           <a:xfrm>
-            <a:off x="853418" y="4617720"/>
-            <a:ext cx="6095847" cy="914400"/>
+            <a:off x="6827349" y="4754880"/>
+            <a:ext cx="4632844" cy="914400"/>
           </a:xfrm>
           <a:prstGeom prst="rect">
             <a:avLst/>
@@ -3423,10 +3506,10 @@
             <a:r>
               <a:rPr sz="1400" b="0" i="0">
                 <a:solidFill>
-                  <a:srgbClr val="666666"/>
+                  <a:srgbClr val="FFFFFF"/>
                 </a:solidFill>
               </a:rPr>
-              <a:t>본인 점검 · 2027. 00. 00</a:t>
+              <a:t>본인 점검 · 날짜 입력</a:t>
             </a:r>
           </a:p>
           <a:p>
@@ -3438,7 +3521,7 @@
             <a:r>
               <a:rPr sz="1400" b="0" i="0">
                 <a:solidFill>
-                  <a:srgbClr val="666666"/>
+                  <a:srgbClr val="FFFFFF"/>
                 </a:solidFill>
               </a:rPr>
               <a:t>가입 내용을 정리하고 함께 확인하는 양식</a:t>
@@ -3460,7 +3543,7 @@
     <p:bg>
       <p:bgPr>
         <a:solidFill>
-          <a:srgbClr val="EFD9D1"/>
+          <a:srgbClr val="F6DED5"/>
         </a:solidFill>
         <a:effectLst/>
       </p:bgPr>
@@ -3480,20 +3563,84 @@
         </p:nvSpPr>
         <p:spPr>
           <a:xfrm>
-            <a:off x="274320" y="274320"/>
-            <a:ext cx="11643055" cy="6309360"/>
+            <a:off x="640080" y="566928"/>
+            <a:ext cx="10911535" cy="10972"/>
           </a:xfrm>
           <a:prstGeom prst="rect">
             <a:avLst/>
           </a:prstGeom>
           <a:solidFill>
-            <a:srgbClr val="FFFFFF"/>
+            <a:srgbClr val="26231F"/>
           </a:solidFill>
-          <a:ln w="25400">
-            <a:solidFill>
-              <a:srgbClr val="7D4531"/>
-            </a:solidFill>
-            <a:prstDash val="dash"/>
+          <a:ln>
+            <a:noFill/>
+          </a:ln>
+        </p:spPr>
+        <p:txBody>
+          <a:bodyPr rtlCol="0" anchor="ctr"/>
+          <a:lstStyle/>
+          <a:p>
+            <a:pPr algn="ctr"/>
+          </a:p>
+        </p:txBody>
+      </p:sp>
+      <p:sp>
+        <p:nvSpPr>
+          <p:cNvPr id="4" name="상단 라벨"/>
+          <p:cNvSpPr txBox="1"/>
+          <p:nvPr/>
+        </p:nvSpPr>
+        <p:spPr>
+          <a:xfrm>
+            <a:off x="640080" y="237744"/>
+            <a:ext cx="5486400" cy="274320"/>
+          </a:xfrm>
+          <a:prstGeom prst="rect">
+            <a:avLst/>
+          </a:prstGeom>
+          <a:noFill/>
+        </p:spPr>
+        <p:txBody>
+          <a:bodyPr wrap="square" lIns="54864" rIns="54864" tIns="27432" bIns="27432" anchor="ctr">
+            <a:noAutofit/>
+          </a:bodyPr>
+          <a:lstStyle/>
+          <a:p>
+            <a:pPr algn="l">
+              <a:lnSpc>
+                <a:spcPct val="115000"/>
+              </a:lnSpc>
+            </a:pPr>
+            <a:r>
+              <a:rPr sz="900" b="1" i="0" spc="250">
+                <a:solidFill>
+                  <a:srgbClr val="26231F"/>
+                </a:solidFill>
+              </a:rPr>
+              <a:t>INSURANCE CHECK</a:t>
+            </a:r>
+          </a:p>
+        </p:txBody>
+      </p:sp>
+      <p:sp>
+        <p:nvSpPr>
+          <p:cNvPr id="5" name="포인트"/>
+          <p:cNvSpPr/>
+          <p:nvPr/>
+        </p:nvSpPr>
+        <p:spPr>
+          <a:xfrm>
+            <a:off x="11204143" y="246888"/>
+            <a:ext cx="237744" cy="237744"/>
+          </a:xfrm>
+          <a:prstGeom prst="moon">
+            <a:avLst/>
+          </a:prstGeom>
+          <a:solidFill>
+            <a:srgbClr val="E1AC98"/>
+          </a:solidFill>
+          <a:ln>
+            <a:noFill/>
           </a:ln>
         </p:spPr>
         <p:txBody>
@@ -3516,8 +3663,8 @@
         </p:nvSpPr>
         <p:spPr>
           <a:xfrm>
-            <a:off x="777240" y="548640"/>
-            <a:ext cx="9357055" cy="822960"/>
+            <a:off x="640080" y="731520"/>
+            <a:ext cx="10911535" cy="822960"/>
           </a:xfrm>
         </p:spPr>
         <p:txBody>
@@ -3534,7 +3681,7 @@
             <a:r>
               <a:rPr sz="3000" b="1" i="0">
                 <a:solidFill>
-                  <a:srgbClr val="3B2017"/>
+                  <a:srgbClr val="26231F"/>
                 </a:solidFill>
               </a:rPr>
               <a:t>점검 대상 현황</a:t>
@@ -3544,15 +3691,15 @@
       </p:sp>
       <p:graphicFrame>
         <p:nvGraphicFramePr>
-          <p:cNvPr id="4" name="표"/>
+          <p:cNvPr id="6" name="표"/>
           <p:cNvGraphicFramePr>
             <a:graphicFrameLocks noGrp="1"/>
           </p:cNvGraphicFramePr>
           <p:nvPr/>
         </p:nvGraphicFramePr>
         <p:xfrm>
-          <a:off x="777240" y="1554480"/>
-          <a:ext cx="10637214" cy="3657600"/>
+          <a:off x="640080" y="1783080"/>
+          <a:ext cx="10911534" cy="3657600"/>
         </p:xfrm>
         <a:graphic>
           <a:graphicData uri="http://schemas.openxmlformats.org/drawingml/2006/table">
@@ -3561,8 +3708,8 @@
                 <a:tableStyleId>{5C22544A-7EE6-4342-B048-85BDC9FD1C3A}</a:tableStyleId>
               </a:tblPr>
               <a:tblGrid>
-                <a:gridCol w="5318607"/>
-                <a:gridCol w="5318607"/>
+                <a:gridCol w="5455767"/>
+                <a:gridCol w="5455767"/>
               </a:tblGrid>
               <a:tr h="731520">
                 <a:tc>
@@ -3574,7 +3721,7 @@
                       <a:r>
                         <a:rPr sz="1600" b="1">
                           <a:solidFill>
-                            <a:srgbClr val="FFFFFF"/>
+                            <a:srgbClr val="26231F"/>
                           </a:solidFill>
                         </a:rPr>
                         <a:t>구분</a:t>
@@ -3584,30 +3731,30 @@
                   <a:tcPr anchor="ctr" marL="73152" marR="73152">
                     <a:lnL w="9525" cap="flat" cmpd="sng" algn="ctr">
                       <a:solidFill>
-                        <a:srgbClr val="7D4531"/>
+                        <a:srgbClr val="E1AC98"/>
                       </a:solidFill>
                       <a:prstDash val="solid"/>
                     </a:lnL>
                     <a:lnR w="9525" cap="flat" cmpd="sng" algn="ctr">
                       <a:solidFill>
-                        <a:srgbClr val="7D4531"/>
+                        <a:srgbClr val="E1AC98"/>
                       </a:solidFill>
                       <a:prstDash val="solid"/>
                     </a:lnR>
                     <a:lnT w="9525" cap="flat" cmpd="sng" algn="ctr">
                       <a:solidFill>
-                        <a:srgbClr val="7D4531"/>
+                        <a:srgbClr val="E1AC98"/>
                       </a:solidFill>
                       <a:prstDash val="solid"/>
                     </a:lnT>
                     <a:lnB w="9525" cap="flat" cmpd="sng" algn="ctr">
                       <a:solidFill>
-                        <a:srgbClr val="7D4531"/>
+                        <a:srgbClr val="E1AC98"/>
                       </a:solidFill>
                       <a:prstDash val="solid"/>
                     </a:lnB>
                     <a:solidFill>
-                      <a:srgbClr val="7D4531"/>
+                      <a:srgbClr val="E1AC98"/>
                     </a:solidFill>
                   </a:tcPr>
                 </a:tc>
@@ -3620,7 +3767,7 @@
                       <a:r>
                         <a:rPr sz="1600" b="1">
                           <a:solidFill>
-                            <a:srgbClr val="FFFFFF"/>
+                            <a:srgbClr val="26231F"/>
                           </a:solidFill>
                         </a:rPr>
                         <a:t>내용</a:t>
@@ -3630,30 +3777,30 @@
                   <a:tcPr anchor="ctr" marL="73152" marR="73152">
                     <a:lnL w="9525" cap="flat" cmpd="sng" algn="ctr">
                       <a:solidFill>
-                        <a:srgbClr val="7D4531"/>
+                        <a:srgbClr val="E1AC98"/>
                       </a:solidFill>
                       <a:prstDash val="solid"/>
                     </a:lnL>
                     <a:lnR w="9525" cap="flat" cmpd="sng" algn="ctr">
                       <a:solidFill>
-                        <a:srgbClr val="7D4531"/>
+                        <a:srgbClr val="E1AC98"/>
                       </a:solidFill>
                       <a:prstDash val="solid"/>
                     </a:lnR>
                     <a:lnT w="9525" cap="flat" cmpd="sng" algn="ctr">
                       <a:solidFill>
-                        <a:srgbClr val="7D4531"/>
+                        <a:srgbClr val="E1AC98"/>
                       </a:solidFill>
                       <a:prstDash val="solid"/>
                     </a:lnT>
                     <a:lnB w="9525" cap="flat" cmpd="sng" algn="ctr">
                       <a:solidFill>
-                        <a:srgbClr val="7D4531"/>
+                        <a:srgbClr val="E1AC98"/>
                       </a:solidFill>
                       <a:prstDash val="solid"/>
                     </a:lnB>
                     <a:solidFill>
-                      <a:srgbClr val="7D4531"/>
+                      <a:srgbClr val="E1AC98"/>
                     </a:solidFill>
                   </a:tcPr>
                 </a:tc>
@@ -3668,7 +3815,7 @@
                       <a:r>
                         <a:rPr sz="1600" b="1">
                           <a:solidFill>
-                            <a:srgbClr val="3B2017"/>
+                            <a:srgbClr val="493027"/>
                           </a:solidFill>
                         </a:rPr>
                         <a:t>이름</a:t>
@@ -3678,30 +3825,30 @@
                   <a:tcPr anchor="ctr" marL="73152" marR="73152">
                     <a:lnL w="9525" cap="flat" cmpd="sng" algn="ctr">
                       <a:solidFill>
-                        <a:srgbClr val="EFD9D1"/>
+                        <a:srgbClr val="F6DED5"/>
                       </a:solidFill>
                       <a:prstDash val="solid"/>
                     </a:lnL>
                     <a:lnR w="9525" cap="flat" cmpd="sng" algn="ctr">
                       <a:solidFill>
-                        <a:srgbClr val="EFD9D1"/>
+                        <a:srgbClr val="F6DED5"/>
                       </a:solidFill>
                       <a:prstDash val="solid"/>
                     </a:lnR>
                     <a:lnT w="9525" cap="flat" cmpd="sng" algn="ctr">
                       <a:solidFill>
-                        <a:srgbClr val="EFD9D1"/>
+                        <a:srgbClr val="F6DED5"/>
                       </a:solidFill>
                       <a:prstDash val="solid"/>
                     </a:lnT>
                     <a:lnB w="9525" cap="flat" cmpd="sng" algn="ctr">
                       <a:solidFill>
-                        <a:srgbClr val="EFD9D1"/>
+                        <a:srgbClr val="F6DED5"/>
                       </a:solidFill>
                       <a:prstDash val="solid"/>
                     </a:lnB>
                     <a:solidFill>
-                      <a:srgbClr val="EFD9D1"/>
+                      <a:srgbClr val="F6DED5"/>
                     </a:solidFill>
                   </a:tcPr>
                 </a:tc>
@@ -3714,7 +3861,7 @@
                       <a:r>
                         <a:rPr sz="1600" b="0">
                           <a:solidFill>
-                            <a:srgbClr val="2B2B2B"/>
+                            <a:srgbClr val="26231F"/>
                           </a:solidFill>
                         </a:rPr>
                         <a:t/>
@@ -3724,25 +3871,25 @@
                   <a:tcPr anchor="ctr" marL="73152" marR="73152">
                     <a:lnL w="9525" cap="flat" cmpd="sng" algn="ctr">
                       <a:solidFill>
-                        <a:srgbClr val="EFD9D1"/>
+                        <a:srgbClr val="F6DED5"/>
                       </a:solidFill>
                       <a:prstDash val="solid"/>
                     </a:lnL>
                     <a:lnR w="9525" cap="flat" cmpd="sng" algn="ctr">
                       <a:solidFill>
-                        <a:srgbClr val="EFD9D1"/>
+                        <a:srgbClr val="F6DED5"/>
                       </a:solidFill>
                       <a:prstDash val="solid"/>
                     </a:lnR>
                     <a:lnT w="9525" cap="flat" cmpd="sng" algn="ctr">
                       <a:solidFill>
-                        <a:srgbClr val="EFD9D1"/>
+                        <a:srgbClr val="F6DED5"/>
                       </a:solidFill>
                       <a:prstDash val="solid"/>
                     </a:lnT>
                     <a:lnB w="9525" cap="flat" cmpd="sng" algn="ctr">
                       <a:solidFill>
-                        <a:srgbClr val="EFD9D1"/>
+                        <a:srgbClr val="F6DED5"/>
                       </a:solidFill>
                       <a:prstDash val="solid"/>
                     </a:lnB>
@@ -3762,7 +3909,7 @@
                       <a:r>
                         <a:rPr sz="1600" b="1">
                           <a:solidFill>
-                            <a:srgbClr val="3B2017"/>
+                            <a:srgbClr val="493027"/>
                           </a:solidFill>
                         </a:rPr>
                         <a:t>나이</a:t>
@@ -3772,30 +3919,30 @@
                   <a:tcPr anchor="ctr" marL="73152" marR="73152">
                     <a:lnL w="9525" cap="flat" cmpd="sng" algn="ctr">
                       <a:solidFill>
-                        <a:srgbClr val="EFD9D1"/>
+                        <a:srgbClr val="F6DED5"/>
                       </a:solidFill>
                       <a:prstDash val="solid"/>
                     </a:lnL>
                     <a:lnR w="9525" cap="flat" cmpd="sng" algn="ctr">
                       <a:solidFill>
-                        <a:srgbClr val="EFD9D1"/>
+                        <a:srgbClr val="F6DED5"/>
                       </a:solidFill>
                       <a:prstDash val="solid"/>
                     </a:lnR>
                     <a:lnT w="9525" cap="flat" cmpd="sng" algn="ctr">
                       <a:solidFill>
-                        <a:srgbClr val="EFD9D1"/>
+                        <a:srgbClr val="F6DED5"/>
                       </a:solidFill>
                       <a:prstDash val="solid"/>
                     </a:lnT>
                     <a:lnB w="9525" cap="flat" cmpd="sng" algn="ctr">
                       <a:solidFill>
-                        <a:srgbClr val="EFD9D1"/>
+                        <a:srgbClr val="F6DED5"/>
                       </a:solidFill>
                       <a:prstDash val="solid"/>
                     </a:lnB>
                     <a:solidFill>
-                      <a:srgbClr val="EFD9D1"/>
+                      <a:srgbClr val="F6DED5"/>
                     </a:solidFill>
                   </a:tcPr>
                 </a:tc>
@@ -3808,7 +3955,7 @@
                       <a:r>
                         <a:rPr sz="1600" b="0">
                           <a:solidFill>
-                            <a:srgbClr val="2B2B2B"/>
+                            <a:srgbClr val="26231F"/>
                           </a:solidFill>
                         </a:rPr>
                         <a:t/>
@@ -3818,30 +3965,30 @@
                   <a:tcPr anchor="ctr" marL="73152" marR="73152">
                     <a:lnL w="9525" cap="flat" cmpd="sng" algn="ctr">
                       <a:solidFill>
-                        <a:srgbClr val="EFD9D1"/>
+                        <a:srgbClr val="F6DED5"/>
                       </a:solidFill>
                       <a:prstDash val="solid"/>
                     </a:lnL>
                     <a:lnR w="9525" cap="flat" cmpd="sng" algn="ctr">
                       <a:solidFill>
-                        <a:srgbClr val="EFD9D1"/>
+                        <a:srgbClr val="F6DED5"/>
                       </a:solidFill>
                       <a:prstDash val="solid"/>
                     </a:lnR>
                     <a:lnT w="9525" cap="flat" cmpd="sng" algn="ctr">
                       <a:solidFill>
-                        <a:srgbClr val="EFD9D1"/>
+                        <a:srgbClr val="F6DED5"/>
                       </a:solidFill>
                       <a:prstDash val="solid"/>
                     </a:lnT>
                     <a:lnB w="9525" cap="flat" cmpd="sng" algn="ctr">
                       <a:solidFill>
-                        <a:srgbClr val="EFD9D1"/>
+                        <a:srgbClr val="F6DED5"/>
                       </a:solidFill>
                       <a:prstDash val="solid"/>
                     </a:lnB>
                     <a:solidFill>
-                      <a:srgbClr val="F9F3F0"/>
+                      <a:srgbClr val="FBF0EC"/>
                     </a:solidFill>
                   </a:tcPr>
                 </a:tc>
@@ -3856,7 +4003,7 @@
                       <a:r>
                         <a:rPr sz="1600" b="1">
                           <a:solidFill>
-                            <a:srgbClr val="3B2017"/>
+                            <a:srgbClr val="493027"/>
                           </a:solidFill>
                         </a:rPr>
                         <a:t>직업</a:t>
@@ -3866,30 +4013,30 @@
                   <a:tcPr anchor="ctr" marL="73152" marR="73152">
                     <a:lnL w="9525" cap="flat" cmpd="sng" algn="ctr">
                       <a:solidFill>
-                        <a:srgbClr val="EFD9D1"/>
+                        <a:srgbClr val="F6DED5"/>
                       </a:solidFill>
                       <a:prstDash val="solid"/>
                     </a:lnL>
                     <a:lnR w="9525" cap="flat" cmpd="sng" algn="ctr">
                       <a:solidFill>
-                        <a:srgbClr val="EFD9D1"/>
+                        <a:srgbClr val="F6DED5"/>
                       </a:solidFill>
                       <a:prstDash val="solid"/>
                     </a:lnR>
                     <a:lnT w="9525" cap="flat" cmpd="sng" algn="ctr">
                       <a:solidFill>
-                        <a:srgbClr val="EFD9D1"/>
+                        <a:srgbClr val="F6DED5"/>
                       </a:solidFill>
                       <a:prstDash val="solid"/>
                     </a:lnT>
                     <a:lnB w="9525" cap="flat" cmpd="sng" algn="ctr">
                       <a:solidFill>
-                        <a:srgbClr val="EFD9D1"/>
+                        <a:srgbClr val="F6DED5"/>
                       </a:solidFill>
                       <a:prstDash val="solid"/>
                     </a:lnB>
                     <a:solidFill>
-                      <a:srgbClr val="EFD9D1"/>
+                      <a:srgbClr val="F6DED5"/>
                     </a:solidFill>
                   </a:tcPr>
                 </a:tc>
@@ -3902,7 +4049,7 @@
                       <a:r>
                         <a:rPr sz="1600" b="0">
                           <a:solidFill>
-                            <a:srgbClr val="2B2B2B"/>
+                            <a:srgbClr val="26231F"/>
                           </a:solidFill>
                         </a:rPr>
                         <a:t/>
@@ -3912,25 +4059,25 @@
                   <a:tcPr anchor="ctr" marL="73152" marR="73152">
                     <a:lnL w="9525" cap="flat" cmpd="sng" algn="ctr">
                       <a:solidFill>
-                        <a:srgbClr val="EFD9D1"/>
+                        <a:srgbClr val="F6DED5"/>
                       </a:solidFill>
                       <a:prstDash val="solid"/>
                     </a:lnL>
                     <a:lnR w="9525" cap="flat" cmpd="sng" algn="ctr">
                       <a:solidFill>
-                        <a:srgbClr val="EFD9D1"/>
+                        <a:srgbClr val="F6DED5"/>
                       </a:solidFill>
                       <a:prstDash val="solid"/>
                     </a:lnR>
                     <a:lnT w="9525" cap="flat" cmpd="sng" algn="ctr">
                       <a:solidFill>
-                        <a:srgbClr val="EFD9D1"/>
+                        <a:srgbClr val="F6DED5"/>
                       </a:solidFill>
                       <a:prstDash val="solid"/>
                     </a:lnT>
                     <a:lnB w="9525" cap="flat" cmpd="sng" algn="ctr">
                       <a:solidFill>
-                        <a:srgbClr val="EFD9D1"/>
+                        <a:srgbClr val="F6DED5"/>
                       </a:solidFill>
                       <a:prstDash val="solid"/>
                     </a:lnB>
@@ -3950,7 +4097,7 @@
                       <a:r>
                         <a:rPr sz="1600" b="1">
                           <a:solidFill>
-                            <a:srgbClr val="3B2017"/>
+                            <a:srgbClr val="493027"/>
                           </a:solidFill>
                         </a:rPr>
                         <a:t>가족 구성</a:t>
@@ -3960,30 +4107,30 @@
                   <a:tcPr anchor="ctr" marL="73152" marR="73152">
                     <a:lnL w="9525" cap="flat" cmpd="sng" algn="ctr">
                       <a:solidFill>
-                        <a:srgbClr val="EFD9D1"/>
+                        <a:srgbClr val="F6DED5"/>
                       </a:solidFill>
                       <a:prstDash val="solid"/>
                     </a:lnL>
                     <a:lnR w="9525" cap="flat" cmpd="sng" algn="ctr">
                       <a:solidFill>
-                        <a:srgbClr val="EFD9D1"/>
+                        <a:srgbClr val="F6DED5"/>
                       </a:solidFill>
                       <a:prstDash val="solid"/>
                     </a:lnR>
                     <a:lnT w="9525" cap="flat" cmpd="sng" algn="ctr">
                       <a:solidFill>
-                        <a:srgbClr val="EFD9D1"/>
+                        <a:srgbClr val="F6DED5"/>
                       </a:solidFill>
                       <a:prstDash val="solid"/>
                     </a:lnT>
                     <a:lnB w="9525" cap="flat" cmpd="sng" algn="ctr">
                       <a:solidFill>
-                        <a:srgbClr val="EFD9D1"/>
+                        <a:srgbClr val="F6DED5"/>
                       </a:solidFill>
                       <a:prstDash val="solid"/>
                     </a:lnB>
                     <a:solidFill>
-                      <a:srgbClr val="EFD9D1"/>
+                      <a:srgbClr val="F6DED5"/>
                     </a:solidFill>
                   </a:tcPr>
                 </a:tc>
@@ -3996,7 +4143,7 @@
                       <a:r>
                         <a:rPr sz="1600" b="0">
                           <a:solidFill>
-                            <a:srgbClr val="2B2B2B"/>
+                            <a:srgbClr val="26231F"/>
                           </a:solidFill>
                         </a:rPr>
                         <a:t/>
@@ -4006,30 +4153,30 @@
                   <a:tcPr anchor="ctr" marL="73152" marR="73152">
                     <a:lnL w="9525" cap="flat" cmpd="sng" algn="ctr">
                       <a:solidFill>
-                        <a:srgbClr val="EFD9D1"/>
+                        <a:srgbClr val="F6DED5"/>
                       </a:solidFill>
                       <a:prstDash val="solid"/>
                     </a:lnL>
                     <a:lnR w="9525" cap="flat" cmpd="sng" algn="ctr">
                       <a:solidFill>
-                        <a:srgbClr val="EFD9D1"/>
+                        <a:srgbClr val="F6DED5"/>
                       </a:solidFill>
                       <a:prstDash val="solid"/>
                     </a:lnR>
                     <a:lnT w="9525" cap="flat" cmpd="sng" algn="ctr">
                       <a:solidFill>
-                        <a:srgbClr val="EFD9D1"/>
+                        <a:srgbClr val="F6DED5"/>
                       </a:solidFill>
                       <a:prstDash val="solid"/>
                     </a:lnT>
                     <a:lnB w="9525" cap="flat" cmpd="sng" algn="ctr">
                       <a:solidFill>
-                        <a:srgbClr val="EFD9D1"/>
+                        <a:srgbClr val="F6DED5"/>
                       </a:solidFill>
                       <a:prstDash val="solid"/>
                     </a:lnB>
                     <a:solidFill>
-                      <a:srgbClr val="F9F3F0"/>
+                      <a:srgbClr val="FBF0EC"/>
                     </a:solidFill>
                   </a:tcPr>
                 </a:tc>
@@ -4052,7 +4199,7 @@
     <p:bg>
       <p:bgPr>
         <a:solidFill>
-          <a:srgbClr val="EFD9D1"/>
+          <a:srgbClr val="F6DED5"/>
         </a:solidFill>
         <a:effectLst/>
       </p:bgPr>
@@ -4072,20 +4219,84 @@
         </p:nvSpPr>
         <p:spPr>
           <a:xfrm>
-            <a:off x="274320" y="274320"/>
-            <a:ext cx="11643055" cy="6309360"/>
+            <a:off x="640080" y="566928"/>
+            <a:ext cx="10911535" cy="10972"/>
           </a:xfrm>
           <a:prstGeom prst="rect">
             <a:avLst/>
           </a:prstGeom>
           <a:solidFill>
-            <a:srgbClr val="FFFFFF"/>
+            <a:srgbClr val="26231F"/>
           </a:solidFill>
-          <a:ln w="25400">
-            <a:solidFill>
-              <a:srgbClr val="7D4531"/>
-            </a:solidFill>
-            <a:prstDash val="dash"/>
+          <a:ln>
+            <a:noFill/>
+          </a:ln>
+        </p:spPr>
+        <p:txBody>
+          <a:bodyPr rtlCol="0" anchor="ctr"/>
+          <a:lstStyle/>
+          <a:p>
+            <a:pPr algn="ctr"/>
+          </a:p>
+        </p:txBody>
+      </p:sp>
+      <p:sp>
+        <p:nvSpPr>
+          <p:cNvPr id="4" name="상단 라벨"/>
+          <p:cNvSpPr txBox="1"/>
+          <p:nvPr/>
+        </p:nvSpPr>
+        <p:spPr>
+          <a:xfrm>
+            <a:off x="640080" y="237744"/>
+            <a:ext cx="5486400" cy="274320"/>
+          </a:xfrm>
+          <a:prstGeom prst="rect">
+            <a:avLst/>
+          </a:prstGeom>
+          <a:noFill/>
+        </p:spPr>
+        <p:txBody>
+          <a:bodyPr wrap="square" lIns="54864" rIns="54864" tIns="27432" bIns="27432" anchor="ctr">
+            <a:noAutofit/>
+          </a:bodyPr>
+          <a:lstStyle/>
+          <a:p>
+            <a:pPr algn="l">
+              <a:lnSpc>
+                <a:spcPct val="115000"/>
+              </a:lnSpc>
+            </a:pPr>
+            <a:r>
+              <a:rPr sz="900" b="1" i="0" spc="250">
+                <a:solidFill>
+                  <a:srgbClr val="26231F"/>
+                </a:solidFill>
+              </a:rPr>
+              <a:t>INSURANCE CHECK</a:t>
+            </a:r>
+          </a:p>
+        </p:txBody>
+      </p:sp>
+      <p:sp>
+        <p:nvSpPr>
+          <p:cNvPr id="5" name="포인트"/>
+          <p:cNvSpPr/>
+          <p:nvPr/>
+        </p:nvSpPr>
+        <p:spPr>
+          <a:xfrm>
+            <a:off x="11204143" y="246888"/>
+            <a:ext cx="237744" cy="237744"/>
+          </a:xfrm>
+          <a:prstGeom prst="moon">
+            <a:avLst/>
+          </a:prstGeom>
+          <a:solidFill>
+            <a:srgbClr val="E1AC98"/>
+          </a:solidFill>
+          <a:ln>
+            <a:noFill/>
           </a:ln>
         </p:spPr>
         <p:txBody>
@@ -4108,8 +4319,8 @@
         </p:nvSpPr>
         <p:spPr>
           <a:xfrm>
-            <a:off x="777240" y="548640"/>
-            <a:ext cx="9357055" cy="822960"/>
+            <a:off x="640080" y="731520"/>
+            <a:ext cx="10911535" cy="822960"/>
           </a:xfrm>
         </p:spPr>
         <p:txBody>
@@ -4126,7 +4337,7 @@
             <a:r>
               <a:rPr sz="3000" b="1" i="0">
                 <a:solidFill>
-                  <a:srgbClr val="3B2017"/>
+                  <a:srgbClr val="26231F"/>
                 </a:solidFill>
               </a:rPr>
               <a:t>가입한 보험 목록</a:t>
@@ -4136,15 +4347,15 @@
       </p:sp>
       <p:graphicFrame>
         <p:nvGraphicFramePr>
-          <p:cNvPr id="4" name="표"/>
+          <p:cNvPr id="6" name="표"/>
           <p:cNvGraphicFramePr>
             <a:graphicFrameLocks noGrp="1"/>
           </p:cNvGraphicFramePr>
           <p:nvPr/>
         </p:nvGraphicFramePr>
         <p:xfrm>
-          <a:off x="777240" y="1554480"/>
-          <a:ext cx="10637215" cy="4224528"/>
+          <a:off x="640080" y="1783080"/>
+          <a:ext cx="10911535" cy="4224528"/>
         </p:xfrm>
         <a:graphic>
           <a:graphicData uri="http://schemas.openxmlformats.org/drawingml/2006/table">
@@ -4157,7 +4368,7 @@
                 <a:gridCol w="3108960"/>
                 <a:gridCol w="1828800"/>
                 <a:gridCol w="1828800"/>
-                <a:gridCol w="1858975"/>
+                <a:gridCol w="2133295"/>
               </a:tblGrid>
               <a:tr h="603504">
                 <a:tc>
@@ -4169,7 +4380,7 @@
                       <a:r>
                         <a:rPr sz="1400" b="1">
                           <a:solidFill>
-                            <a:srgbClr val="FFFFFF"/>
+                            <a:srgbClr val="26231F"/>
                           </a:solidFill>
                         </a:rPr>
                         <a:t>보험회사</a:t>
@@ -4179,30 +4390,30 @@
                   <a:tcPr anchor="ctr" marL="73152" marR="73152">
                     <a:lnL w="9525" cap="flat" cmpd="sng" algn="ctr">
                       <a:solidFill>
-                        <a:srgbClr val="7D4531"/>
+                        <a:srgbClr val="E1AC98"/>
                       </a:solidFill>
                       <a:prstDash val="solid"/>
                     </a:lnL>
                     <a:lnR w="9525" cap="flat" cmpd="sng" algn="ctr">
                       <a:solidFill>
-                        <a:srgbClr val="7D4531"/>
+                        <a:srgbClr val="E1AC98"/>
                       </a:solidFill>
                       <a:prstDash val="solid"/>
                     </a:lnR>
                     <a:lnT w="9525" cap="flat" cmpd="sng" algn="ctr">
                       <a:solidFill>
-                        <a:srgbClr val="7D4531"/>
+                        <a:srgbClr val="E1AC98"/>
                       </a:solidFill>
                       <a:prstDash val="solid"/>
                     </a:lnT>
                     <a:lnB w="9525" cap="flat" cmpd="sng" algn="ctr">
                       <a:solidFill>
-                        <a:srgbClr val="7D4531"/>
+                        <a:srgbClr val="E1AC98"/>
                       </a:solidFill>
                       <a:prstDash val="solid"/>
                     </a:lnB>
                     <a:solidFill>
-                      <a:srgbClr val="7D4531"/>
+                      <a:srgbClr val="E1AC98"/>
                     </a:solidFill>
                   </a:tcPr>
                 </a:tc>
@@ -4215,7 +4426,7 @@
                       <a:r>
                         <a:rPr sz="1400" b="1">
                           <a:solidFill>
-                            <a:srgbClr val="FFFFFF"/>
+                            <a:srgbClr val="26231F"/>
                           </a:solidFill>
                         </a:rPr>
                         <a:t>상품명</a:t>
@@ -4225,30 +4436,30 @@
                   <a:tcPr anchor="ctr" marL="73152" marR="73152">
                     <a:lnL w="9525" cap="flat" cmpd="sng" algn="ctr">
                       <a:solidFill>
-                        <a:srgbClr val="7D4531"/>
+                        <a:srgbClr val="E1AC98"/>
                       </a:solidFill>
                       <a:prstDash val="solid"/>
                     </a:lnL>
                     <a:lnR w="9525" cap="flat" cmpd="sng" algn="ctr">
                       <a:solidFill>
-                        <a:srgbClr val="7D4531"/>
+                        <a:srgbClr val="E1AC98"/>
                       </a:solidFill>
                       <a:prstDash val="solid"/>
                     </a:lnR>
                     <a:lnT w="9525" cap="flat" cmpd="sng" algn="ctr">
                       <a:solidFill>
-                        <a:srgbClr val="7D4531"/>
+                        <a:srgbClr val="E1AC98"/>
                       </a:solidFill>
                       <a:prstDash val="solid"/>
                     </a:lnT>
                     <a:lnB w="9525" cap="flat" cmpd="sng" algn="ctr">
                       <a:solidFill>
-                        <a:srgbClr val="7D4531"/>
+                        <a:srgbClr val="E1AC98"/>
                       </a:solidFill>
                       <a:prstDash val="solid"/>
                     </a:lnB>
                     <a:solidFill>
-                      <a:srgbClr val="7D4531"/>
+                      <a:srgbClr val="E1AC98"/>
                     </a:solidFill>
                   </a:tcPr>
                 </a:tc>
@@ -4261,7 +4472,7 @@
                       <a:r>
                         <a:rPr sz="1400" b="1">
                           <a:solidFill>
-                            <a:srgbClr val="FFFFFF"/>
+                            <a:srgbClr val="26231F"/>
                           </a:solidFill>
                         </a:rPr>
                         <a:t>종류</a:t>
@@ -4271,30 +4482,30 @@
                   <a:tcPr anchor="ctr" marL="73152" marR="73152">
                     <a:lnL w="9525" cap="flat" cmpd="sng" algn="ctr">
                       <a:solidFill>
-                        <a:srgbClr val="7D4531"/>
+                        <a:srgbClr val="E1AC98"/>
                       </a:solidFill>
                       <a:prstDash val="solid"/>
                     </a:lnL>
                     <a:lnR w="9525" cap="flat" cmpd="sng" algn="ctr">
                       <a:solidFill>
-                        <a:srgbClr val="7D4531"/>
+                        <a:srgbClr val="E1AC98"/>
                       </a:solidFill>
                       <a:prstDash val="solid"/>
                     </a:lnR>
                     <a:lnT w="9525" cap="flat" cmpd="sng" algn="ctr">
                       <a:solidFill>
-                        <a:srgbClr val="7D4531"/>
+                        <a:srgbClr val="E1AC98"/>
                       </a:solidFill>
                       <a:prstDash val="solid"/>
                     </a:lnT>
                     <a:lnB w="9525" cap="flat" cmpd="sng" algn="ctr">
                       <a:solidFill>
-                        <a:srgbClr val="7D4531"/>
+                        <a:srgbClr val="E1AC98"/>
                       </a:solidFill>
                       <a:prstDash val="solid"/>
                     </a:lnB>
                     <a:solidFill>
-                      <a:srgbClr val="7D4531"/>
+                      <a:srgbClr val="E1AC98"/>
                     </a:solidFill>
                   </a:tcPr>
                 </a:tc>
@@ -4307,7 +4518,7 @@
                       <a:r>
                         <a:rPr sz="1400" b="1">
                           <a:solidFill>
-                            <a:srgbClr val="FFFFFF"/>
+                            <a:srgbClr val="26231F"/>
                           </a:solidFill>
                         </a:rPr>
                         <a:t>만기일</a:t>
@@ -4317,30 +4528,30 @@
                   <a:tcPr anchor="ctr" marL="73152" marR="73152">
                     <a:lnL w="9525" cap="flat" cmpd="sng" algn="ctr">
                       <a:solidFill>
-                        <a:srgbClr val="7D4531"/>
+                        <a:srgbClr val="E1AC98"/>
                       </a:solidFill>
                       <a:prstDash val="solid"/>
                     </a:lnL>
                     <a:lnR w="9525" cap="flat" cmpd="sng" algn="ctr">
                       <a:solidFill>
-                        <a:srgbClr val="7D4531"/>
+                        <a:srgbClr val="E1AC98"/>
                       </a:solidFill>
                       <a:prstDash val="solid"/>
                     </a:lnR>
                     <a:lnT w="9525" cap="flat" cmpd="sng" algn="ctr">
                       <a:solidFill>
-                        <a:srgbClr val="7D4531"/>
+                        <a:srgbClr val="E1AC98"/>
                       </a:solidFill>
                       <a:prstDash val="solid"/>
                     </a:lnT>
                     <a:lnB w="9525" cap="flat" cmpd="sng" algn="ctr">
                       <a:solidFill>
-                        <a:srgbClr val="7D4531"/>
+                        <a:srgbClr val="E1AC98"/>
                       </a:solidFill>
                       <a:prstDash val="solid"/>
                     </a:lnB>
                     <a:solidFill>
-                      <a:srgbClr val="7D4531"/>
+                      <a:srgbClr val="E1AC98"/>
                     </a:solidFill>
                   </a:tcPr>
                 </a:tc>
@@ -4353,7 +4564,7 @@
                       <a:r>
                         <a:rPr sz="1400" b="1">
                           <a:solidFill>
-                            <a:srgbClr val="FFFFFF"/>
+                            <a:srgbClr val="26231F"/>
                           </a:solidFill>
                         </a:rPr>
                         <a:t>월 보험료</a:t>
@@ -4363,30 +4574,30 @@
                   <a:tcPr anchor="ctr" marL="73152" marR="73152">
                     <a:lnL w="9525" cap="flat" cmpd="sng" algn="ctr">
                       <a:solidFill>
-                        <a:srgbClr val="7D4531"/>
+                        <a:srgbClr val="E1AC98"/>
                       </a:solidFill>
                       <a:prstDash val="solid"/>
                     </a:lnL>
                     <a:lnR w="9525" cap="flat" cmpd="sng" algn="ctr">
                       <a:solidFill>
-                        <a:srgbClr val="7D4531"/>
+                        <a:srgbClr val="E1AC98"/>
                       </a:solidFill>
                       <a:prstDash val="solid"/>
                     </a:lnR>
                     <a:lnT w="9525" cap="flat" cmpd="sng" algn="ctr">
                       <a:solidFill>
-                        <a:srgbClr val="7D4531"/>
+                        <a:srgbClr val="E1AC98"/>
                       </a:solidFill>
                       <a:prstDash val="solid"/>
                     </a:lnT>
                     <a:lnB w="9525" cap="flat" cmpd="sng" algn="ctr">
                       <a:solidFill>
-                        <a:srgbClr val="7D4531"/>
+                        <a:srgbClr val="E1AC98"/>
                       </a:solidFill>
                       <a:prstDash val="solid"/>
                     </a:lnB>
                     <a:solidFill>
-                      <a:srgbClr val="7D4531"/>
+                      <a:srgbClr val="E1AC98"/>
                     </a:solidFill>
                   </a:tcPr>
                 </a:tc>
@@ -4401,7 +4612,7 @@
                       <a:r>
                         <a:rPr sz="1400" b="0">
                           <a:solidFill>
-                            <a:srgbClr val="2B2B2B"/>
+                            <a:srgbClr val="26231F"/>
                           </a:solidFill>
                         </a:rPr>
                         <a:t/>
@@ -4411,25 +4622,25 @@
                   <a:tcPr anchor="ctr" marL="73152" marR="73152">
                     <a:lnL w="9525" cap="flat" cmpd="sng" algn="ctr">
                       <a:solidFill>
-                        <a:srgbClr val="EFD9D1"/>
+                        <a:srgbClr val="F6DED5"/>
                       </a:solidFill>
                       <a:prstDash val="solid"/>
                     </a:lnL>
                     <a:lnR w="9525" cap="flat" cmpd="sng" algn="ctr">
                       <a:solidFill>
-                        <a:srgbClr val="EFD9D1"/>
+                        <a:srgbClr val="F6DED5"/>
                       </a:solidFill>
                       <a:prstDash val="solid"/>
                     </a:lnR>
                     <a:lnT w="9525" cap="flat" cmpd="sng" algn="ctr">
                       <a:solidFill>
-                        <a:srgbClr val="EFD9D1"/>
+                        <a:srgbClr val="F6DED5"/>
                       </a:solidFill>
                       <a:prstDash val="solid"/>
                     </a:lnT>
                     <a:lnB w="9525" cap="flat" cmpd="sng" algn="ctr">
                       <a:solidFill>
-                        <a:srgbClr val="EFD9D1"/>
+                        <a:srgbClr val="F6DED5"/>
                       </a:solidFill>
                       <a:prstDash val="solid"/>
                     </a:lnB>
@@ -4447,7 +4658,7 @@
                       <a:r>
                         <a:rPr sz="1400" b="0">
                           <a:solidFill>
-                            <a:srgbClr val="2B2B2B"/>
+                            <a:srgbClr val="26231F"/>
                           </a:solidFill>
                         </a:rPr>
                         <a:t/>
@@ -4457,25 +4668,25 @@
                   <a:tcPr anchor="ctr" marL="73152" marR="73152">
                     <a:lnL w="9525" cap="flat" cmpd="sng" algn="ctr">
                       <a:solidFill>
-                        <a:srgbClr val="EFD9D1"/>
+                        <a:srgbClr val="F6DED5"/>
                       </a:solidFill>
                       <a:prstDash val="solid"/>
                     </a:lnL>
                     <a:lnR w="9525" cap="flat" cmpd="sng" algn="ctr">
                       <a:solidFill>
-                        <a:srgbClr val="EFD9D1"/>
+                        <a:srgbClr val="F6DED5"/>
                       </a:solidFill>
                       <a:prstDash val="solid"/>
                     </a:lnR>
                     <a:lnT w="9525" cap="flat" cmpd="sng" algn="ctr">
                       <a:solidFill>
-                        <a:srgbClr val="EFD9D1"/>
+                        <a:srgbClr val="F6DED5"/>
                       </a:solidFill>
                       <a:prstDash val="solid"/>
                     </a:lnT>
                     <a:lnB w="9525" cap="flat" cmpd="sng" algn="ctr">
                       <a:solidFill>
-                        <a:srgbClr val="EFD9D1"/>
+                        <a:srgbClr val="F6DED5"/>
                       </a:solidFill>
                       <a:prstDash val="solid"/>
                     </a:lnB>
@@ -4493,7 +4704,7 @@
                       <a:r>
                         <a:rPr sz="1400" b="0">
                           <a:solidFill>
-                            <a:srgbClr val="2B2B2B"/>
+                            <a:srgbClr val="26231F"/>
                           </a:solidFill>
                         </a:rPr>
                         <a:t/>
@@ -4503,25 +4714,25 @@
                   <a:tcPr anchor="ctr" marL="73152" marR="73152">
                     <a:lnL w="9525" cap="flat" cmpd="sng" algn="ctr">
                       <a:solidFill>
-                        <a:srgbClr val="EFD9D1"/>
+                        <a:srgbClr val="F6DED5"/>
                       </a:solidFill>
                       <a:prstDash val="solid"/>
                     </a:lnL>
                     <a:lnR w="9525" cap="flat" cmpd="sng" algn="ctr">
                       <a:solidFill>
-                        <a:srgbClr val="EFD9D1"/>
+                        <a:srgbClr val="F6DED5"/>
                       </a:solidFill>
                       <a:prstDash val="solid"/>
                     </a:lnR>
                     <a:lnT w="9525" cap="flat" cmpd="sng" algn="ctr">
                       <a:solidFill>
-                        <a:srgbClr val="EFD9D1"/>
+                        <a:srgbClr val="F6DED5"/>
                       </a:solidFill>
                       <a:prstDash val="solid"/>
                     </a:lnT>
                     <a:lnB w="9525" cap="flat" cmpd="sng" algn="ctr">
                       <a:solidFill>
-                        <a:srgbClr val="EFD9D1"/>
+                        <a:srgbClr val="F6DED5"/>
                       </a:solidFill>
                       <a:prstDash val="solid"/>
                     </a:lnB>
@@ -4539,7 +4750,7 @@
                       <a:r>
                         <a:rPr sz="1400" b="0">
                           <a:solidFill>
-                            <a:srgbClr val="2B2B2B"/>
+                            <a:srgbClr val="26231F"/>
                           </a:solidFill>
                         </a:rPr>
                         <a:t/>
@@ -4549,25 +4760,25 @@
                   <a:tcPr anchor="ctr" marL="73152" marR="73152">
                     <a:lnL w="9525" cap="flat" cmpd="sng" algn="ctr">
                       <a:solidFill>
-                        <a:srgbClr val="EFD9D1"/>
+                        <a:srgbClr val="F6DED5"/>
                       </a:solidFill>
                       <a:prstDash val="solid"/>
                     </a:lnL>
                     <a:lnR w="9525" cap="flat" cmpd="sng" algn="ctr">
                       <a:solidFill>
-                        <a:srgbClr val="EFD9D1"/>
+                        <a:srgbClr val="F6DED5"/>
                       </a:solidFill>
                       <a:prstDash val="solid"/>
                     </a:lnR>
                     <a:lnT w="9525" cap="flat" cmpd="sng" algn="ctr">
                       <a:solidFill>
-                        <a:srgbClr val="EFD9D1"/>
+                        <a:srgbClr val="F6DED5"/>
                       </a:solidFill>
                       <a:prstDash val="solid"/>
                     </a:lnT>
                     <a:lnB w="9525" cap="flat" cmpd="sng" algn="ctr">
                       <a:solidFill>
-                        <a:srgbClr val="EFD9D1"/>
+                        <a:srgbClr val="F6DED5"/>
                       </a:solidFill>
                       <a:prstDash val="solid"/>
                     </a:lnB>
@@ -4585,7 +4796,7 @@
                       <a:r>
                         <a:rPr sz="1400" b="0">
                           <a:solidFill>
-                            <a:srgbClr val="2B2B2B"/>
+                            <a:srgbClr val="26231F"/>
                           </a:solidFill>
                         </a:rPr>
                         <a:t/>
@@ -4595,25 +4806,25 @@
                   <a:tcPr anchor="ctr" marL="73152" marR="73152">
                     <a:lnL w="9525" cap="flat" cmpd="sng" algn="ctr">
                       <a:solidFill>
-                        <a:srgbClr val="EFD9D1"/>
+                        <a:srgbClr val="F6DED5"/>
                       </a:solidFill>
                       <a:prstDash val="solid"/>
                     </a:lnL>
                     <a:lnR w="9525" cap="flat" cmpd="sng" algn="ctr">
                       <a:solidFill>
-                        <a:srgbClr val="EFD9D1"/>
+                        <a:srgbClr val="F6DED5"/>
                       </a:solidFill>
                       <a:prstDash val="solid"/>
                     </a:lnR>
                     <a:lnT w="9525" cap="flat" cmpd="sng" algn="ctr">
                       <a:solidFill>
-                        <a:srgbClr val="EFD9D1"/>
+                        <a:srgbClr val="F6DED5"/>
                       </a:solidFill>
                       <a:prstDash val="solid"/>
                     </a:lnT>
                     <a:lnB w="9525" cap="flat" cmpd="sng" algn="ctr">
                       <a:solidFill>
-                        <a:srgbClr val="EFD9D1"/>
+                        <a:srgbClr val="F6DED5"/>
                       </a:solidFill>
                       <a:prstDash val="solid"/>
                     </a:lnB>
@@ -4633,7 +4844,7 @@
                       <a:r>
                         <a:rPr sz="1400" b="0">
                           <a:solidFill>
-                            <a:srgbClr val="2B2B2B"/>
+                            <a:srgbClr val="26231F"/>
                           </a:solidFill>
                         </a:rPr>
                         <a:t/>
@@ -4643,30 +4854,30 @@
                   <a:tcPr anchor="ctr" marL="73152" marR="73152">
                     <a:lnL w="9525" cap="flat" cmpd="sng" algn="ctr">
                       <a:solidFill>
-                        <a:srgbClr val="EFD9D1"/>
+                        <a:srgbClr val="F6DED5"/>
                       </a:solidFill>
                       <a:prstDash val="solid"/>
                     </a:lnL>
                     <a:lnR w="9525" cap="flat" cmpd="sng" algn="ctr">
                       <a:solidFill>
-                        <a:srgbClr val="EFD9D1"/>
+                        <a:srgbClr val="F6DED5"/>
                       </a:solidFill>
                       <a:prstDash val="solid"/>
                     </a:lnR>
                     <a:lnT w="9525" cap="flat" cmpd="sng" algn="ctr">
                       <a:solidFill>
-                        <a:srgbClr val="EFD9D1"/>
+                        <a:srgbClr val="F6DED5"/>
                       </a:solidFill>
                       <a:prstDash val="solid"/>
                     </a:lnT>
                     <a:lnB w="9525" cap="flat" cmpd="sng" algn="ctr">
                       <a:solidFill>
-                        <a:srgbClr val="EFD9D1"/>
+                        <a:srgbClr val="F6DED5"/>
                       </a:solidFill>
                       <a:prstDash val="solid"/>
                     </a:lnB>
                     <a:solidFill>
-                      <a:srgbClr val="F9F3F0"/>
+                      <a:srgbClr val="FBF0EC"/>
                     </a:solidFill>
                   </a:tcPr>
                 </a:tc>
@@ -4679,7 +4890,7 @@
                       <a:r>
                         <a:rPr sz="1400" b="0">
                           <a:solidFill>
-                            <a:srgbClr val="2B2B2B"/>
+                            <a:srgbClr val="26231F"/>
                           </a:solidFill>
                         </a:rPr>
                         <a:t/>
@@ -4689,30 +4900,30 @@
                   <a:tcPr anchor="ctr" marL="73152" marR="73152">
                     <a:lnL w="9525" cap="flat" cmpd="sng" algn="ctr">
                       <a:solidFill>
-                        <a:srgbClr val="EFD9D1"/>
+                        <a:srgbClr val="F6DED5"/>
                       </a:solidFill>
                       <a:prstDash val="solid"/>
                     </a:lnL>
                     <a:lnR w="9525" cap="flat" cmpd="sng" algn="ctr">
                       <a:solidFill>
-                        <a:srgbClr val="EFD9D1"/>
+                        <a:srgbClr val="F6DED5"/>
                       </a:solidFill>
                       <a:prstDash val="solid"/>
                     </a:lnR>
                     <a:lnT w="9525" cap="flat" cmpd="sng" algn="ctr">
                       <a:solidFill>
-                        <a:srgbClr val="EFD9D1"/>
+                        <a:srgbClr val="F6DED5"/>
                       </a:solidFill>
                       <a:prstDash val="solid"/>
                     </a:lnT>
                     <a:lnB w="9525" cap="flat" cmpd="sng" algn="ctr">
                       <a:solidFill>
-                        <a:srgbClr val="EFD9D1"/>
+                        <a:srgbClr val="F6DED5"/>
                       </a:solidFill>
                       <a:prstDash val="solid"/>
                     </a:lnB>
                     <a:solidFill>
-                      <a:srgbClr val="F9F3F0"/>
+                      <a:srgbClr val="FBF0EC"/>
                     </a:solidFill>
                   </a:tcPr>
                 </a:tc>
@@ -4725,7 +4936,7 @@
                       <a:r>
                         <a:rPr sz="1400" b="0">
                           <a:solidFill>
-                            <a:srgbClr val="2B2B2B"/>
+                            <a:srgbClr val="26231F"/>
                           </a:solidFill>
                         </a:rPr>
                         <a:t/>
@@ -4735,30 +4946,30 @@
                   <a:tcPr anchor="ctr" marL="73152" marR="73152">
                     <a:lnL w="9525" cap="flat" cmpd="sng" algn="ctr">
                       <a:solidFill>
-                        <a:srgbClr val="EFD9D1"/>
+                        <a:srgbClr val="F6DED5"/>
                       </a:solidFill>
                       <a:prstDash val="solid"/>
                     </a:lnL>
                     <a:lnR w="9525" cap="flat" cmpd="sng" algn="ctr">
                       <a:solidFill>
-                        <a:srgbClr val="EFD9D1"/>
+                        <a:srgbClr val="F6DED5"/>
                       </a:solidFill>
                       <a:prstDash val="solid"/>
                     </a:lnR>
                     <a:lnT w="9525" cap="flat" cmpd="sng" algn="ctr">
                       <a:solidFill>
-                        <a:srgbClr val="EFD9D1"/>
+                        <a:srgbClr val="F6DED5"/>
                       </a:solidFill>
                       <a:prstDash val="solid"/>
                     </a:lnT>
                     <a:lnB w="9525" cap="flat" cmpd="sng" algn="ctr">
                       <a:solidFill>
-                        <a:srgbClr val="EFD9D1"/>
+                        <a:srgbClr val="F6DED5"/>
                       </a:solidFill>
                       <a:prstDash val="solid"/>
                     </a:lnB>
                     <a:solidFill>
-                      <a:srgbClr val="F9F3F0"/>
+                      <a:srgbClr val="FBF0EC"/>
                     </a:solidFill>
                   </a:tcPr>
                 </a:tc>
@@ -4771,7 +4982,7 @@
                       <a:r>
                         <a:rPr sz="1400" b="0">
                           <a:solidFill>
-                            <a:srgbClr val="2B2B2B"/>
+                            <a:srgbClr val="26231F"/>
                           </a:solidFill>
                         </a:rPr>
                         <a:t/>
@@ -4781,30 +4992,30 @@
                   <a:tcPr anchor="ctr" marL="73152" marR="73152">
                     <a:lnL w="9525" cap="flat" cmpd="sng" algn="ctr">
                       <a:solidFill>
-                        <a:srgbClr val="EFD9D1"/>
+                        <a:srgbClr val="F6DED5"/>
                       </a:solidFill>
                       <a:prstDash val="solid"/>
                     </a:lnL>
                     <a:lnR w="9525" cap="flat" cmpd="sng" algn="ctr">
                       <a:solidFill>
-                        <a:srgbClr val="EFD9D1"/>
+                        <a:srgbClr val="F6DED5"/>
                       </a:solidFill>
                       <a:prstDash val="solid"/>
                     </a:lnR>
                     <a:lnT w="9525" cap="flat" cmpd="sng" algn="ctr">
                       <a:solidFill>
-                        <a:srgbClr val="EFD9D1"/>
+                        <a:srgbClr val="F6DED5"/>
                       </a:solidFill>
                       <a:prstDash val="solid"/>
                     </a:lnT>
                     <a:lnB w="9525" cap="flat" cmpd="sng" algn="ctr">
                       <a:solidFill>
-                        <a:srgbClr val="EFD9D1"/>
+                        <a:srgbClr val="F6DED5"/>
                       </a:solidFill>
                       <a:prstDash val="solid"/>
                     </a:lnB>
                     <a:solidFill>
-                      <a:srgbClr val="F9F3F0"/>
+                      <a:srgbClr val="FBF0EC"/>
                     </a:solidFill>
                   </a:tcPr>
                 </a:tc>
@@ -4817,7 +5028,7 @@
                       <a:r>
                         <a:rPr sz="1400" b="0">
                           <a:solidFill>
-                            <a:srgbClr val="2B2B2B"/>
+                            <a:srgbClr val="26231F"/>
                           </a:solidFill>
                         </a:rPr>
                         <a:t/>
@@ -4827,30 +5038,30 @@
                   <a:tcPr anchor="ctr" marL="73152" marR="73152">
                     <a:lnL w="9525" cap="flat" cmpd="sng" algn="ctr">
                       <a:solidFill>
-                        <a:srgbClr val="EFD9D1"/>
+                        <a:srgbClr val="F6DED5"/>
                       </a:solidFill>
                       <a:prstDash val="solid"/>
                     </a:lnL>
                     <a:lnR w="9525" cap="flat" cmpd="sng" algn="ctr">
                       <a:solidFill>
-                        <a:srgbClr val="EFD9D1"/>
+                        <a:srgbClr val="F6DED5"/>
                       </a:solidFill>
                       <a:prstDash val="solid"/>
                     </a:lnR>
                     <a:lnT w="9525" cap="flat" cmpd="sng" algn="ctr">
                       <a:solidFill>
-                        <a:srgbClr val="EFD9D1"/>
+                        <a:srgbClr val="F6DED5"/>
                       </a:solidFill>
                       <a:prstDash val="solid"/>
                     </a:lnT>
                     <a:lnB w="9525" cap="flat" cmpd="sng" algn="ctr">
                       <a:solidFill>
-                        <a:srgbClr val="EFD9D1"/>
+                        <a:srgbClr val="F6DED5"/>
                       </a:solidFill>
                       <a:prstDash val="solid"/>
                     </a:lnB>
                     <a:solidFill>
-                      <a:srgbClr val="F9F3F0"/>
+                      <a:srgbClr val="FBF0EC"/>
                     </a:solidFill>
                   </a:tcPr>
                 </a:tc>
@@ -4865,7 +5076,7 @@
                       <a:r>
                         <a:rPr sz="1400" b="0">
                           <a:solidFill>
-                            <a:srgbClr val="2B2B2B"/>
+                            <a:srgbClr val="26231F"/>
                           </a:solidFill>
                         </a:rPr>
                         <a:t/>
@@ -4875,25 +5086,25 @@
                   <a:tcPr anchor="ctr" marL="73152" marR="73152">
                     <a:lnL w="9525" cap="flat" cmpd="sng" algn="ctr">
                       <a:solidFill>
-                        <a:srgbClr val="EFD9D1"/>
+                        <a:srgbClr val="F6DED5"/>
                       </a:solidFill>
                       <a:prstDash val="solid"/>
                     </a:lnL>
                     <a:lnR w="9525" cap="flat" cmpd="sng" algn="ctr">
                       <a:solidFill>
-                        <a:srgbClr val="EFD9D1"/>
+                        <a:srgbClr val="F6DED5"/>
                       </a:solidFill>
                       <a:prstDash val="solid"/>
                     </a:lnR>
                     <a:lnT w="9525" cap="flat" cmpd="sng" algn="ctr">
                       <a:solidFill>
-                        <a:srgbClr val="EFD9D1"/>
+                        <a:srgbClr val="F6DED5"/>
                       </a:solidFill>
                       <a:prstDash val="solid"/>
                     </a:lnT>
                     <a:lnB w="9525" cap="flat" cmpd="sng" algn="ctr">
                       <a:solidFill>
-                        <a:srgbClr val="EFD9D1"/>
+                        <a:srgbClr val="F6DED5"/>
                       </a:solidFill>
                       <a:prstDash val="solid"/>
                     </a:lnB>
@@ -4911,7 +5122,7 @@
                       <a:r>
                         <a:rPr sz="1400" b="0">
                           <a:solidFill>
-                            <a:srgbClr val="2B2B2B"/>
+                            <a:srgbClr val="26231F"/>
                           </a:solidFill>
                         </a:rPr>
                         <a:t/>
@@ -4921,25 +5132,25 @@
                   <a:tcPr anchor="ctr" marL="73152" marR="73152">
                     <a:lnL w="9525" cap="flat" cmpd="sng" algn="ctr">
                       <a:solidFill>
-                        <a:srgbClr val="EFD9D1"/>
+                        <a:srgbClr val="F6DED5"/>
                       </a:solidFill>
                       <a:prstDash val="solid"/>
                     </a:lnL>
                     <a:lnR w="9525" cap="flat" cmpd="sng" algn="ctr">
                       <a:solidFill>
-                        <a:srgbClr val="EFD9D1"/>
+                        <a:srgbClr val="F6DED5"/>
                       </a:solidFill>
                       <a:prstDash val="solid"/>
                     </a:lnR>
                     <a:lnT w="9525" cap="flat" cmpd="sng" algn="ctr">
                       <a:solidFill>
-                        <a:srgbClr val="EFD9D1"/>
+                        <a:srgbClr val="F6DED5"/>
                       </a:solidFill>
                       <a:prstDash val="solid"/>
                     </a:lnT>
                     <a:lnB w="9525" cap="flat" cmpd="sng" algn="ctr">
                       <a:solidFill>
-                        <a:srgbClr val="EFD9D1"/>
+                        <a:srgbClr val="F6DED5"/>
                       </a:solidFill>
                       <a:prstDash val="solid"/>
                     </a:lnB>
@@ -4957,7 +5168,7 @@
                       <a:r>
                         <a:rPr sz="1400" b="0">
                           <a:solidFill>
-                            <a:srgbClr val="2B2B2B"/>
+                            <a:srgbClr val="26231F"/>
                           </a:solidFill>
                         </a:rPr>
                         <a:t/>
@@ -4967,25 +5178,25 @@
                   <a:tcPr anchor="ctr" marL="73152" marR="73152">
                     <a:lnL w="9525" cap="flat" cmpd="sng" algn="ctr">
                       <a:solidFill>
-                        <a:srgbClr val="EFD9D1"/>
+                        <a:srgbClr val="F6DED5"/>
                       </a:solidFill>
                       <a:prstDash val="solid"/>
                     </a:lnL>
                     <a:lnR w="9525" cap="flat" cmpd="sng" algn="ctr">
                       <a:solidFill>
-                        <a:srgbClr val="EFD9D1"/>
+                        <a:srgbClr val="F6DED5"/>
                       </a:solidFill>
                       <a:prstDash val="solid"/>
                     </a:lnR>
                     <a:lnT w="9525" cap="flat" cmpd="sng" algn="ctr">
                       <a:solidFill>
-                        <a:srgbClr val="EFD9D1"/>
+                        <a:srgbClr val="F6DED5"/>
                       </a:solidFill>
                       <a:prstDash val="solid"/>
                     </a:lnT>
                     <a:lnB w="9525" cap="flat" cmpd="sng" algn="ctr">
                       <a:solidFill>
-                        <a:srgbClr val="EFD9D1"/>
+                        <a:srgbClr val="F6DED5"/>
                       </a:solidFill>
                       <a:prstDash val="solid"/>
                     </a:lnB>
@@ -5003,7 +5214,7 @@
                       <a:r>
                         <a:rPr sz="1400" b="0">
                           <a:solidFill>
-                            <a:srgbClr val="2B2B2B"/>
+                            <a:srgbClr val="26231F"/>
                           </a:solidFill>
                         </a:rPr>
                         <a:t/>
@@ -5013,25 +5224,25 @@
                   <a:tcPr anchor="ctr" marL="73152" marR="73152">
                     <a:lnL w="9525" cap="flat" cmpd="sng" algn="ctr">
                       <a:solidFill>
-                        <a:srgbClr val="EFD9D1"/>
+                        <a:srgbClr val="F6DED5"/>
                       </a:solidFill>
                       <a:prstDash val="solid"/>
                     </a:lnL>
                     <a:lnR w="9525" cap="flat" cmpd="sng" algn="ctr">
                       <a:solidFill>
-                        <a:srgbClr val="EFD9D1"/>
+                        <a:srgbClr val="F6DED5"/>
                       </a:solidFill>
                       <a:prstDash val="solid"/>
                     </a:lnR>
                     <a:lnT w="9525" cap="flat" cmpd="sng" algn="ctr">
                       <a:solidFill>
-                        <a:srgbClr val="EFD9D1"/>
+                        <a:srgbClr val="F6DED5"/>
                       </a:solidFill>
                       <a:prstDash val="solid"/>
                     </a:lnT>
                     <a:lnB w="9525" cap="flat" cmpd="sng" algn="ctr">
                       <a:solidFill>
-                        <a:srgbClr val="EFD9D1"/>
+                        <a:srgbClr val="F6DED5"/>
                       </a:solidFill>
                       <a:prstDash val="solid"/>
                     </a:lnB>
@@ -5049,7 +5260,7 @@
                       <a:r>
                         <a:rPr sz="1400" b="0">
                           <a:solidFill>
-                            <a:srgbClr val="2B2B2B"/>
+                            <a:srgbClr val="26231F"/>
                           </a:solidFill>
                         </a:rPr>
                         <a:t/>
@@ -5059,25 +5270,25 @@
                   <a:tcPr anchor="ctr" marL="73152" marR="73152">
                     <a:lnL w="9525" cap="flat" cmpd="sng" algn="ctr">
                       <a:solidFill>
-                        <a:srgbClr val="EFD9D1"/>
+                        <a:srgbClr val="F6DED5"/>
                       </a:solidFill>
                       <a:prstDash val="solid"/>
                     </a:lnL>
                     <a:lnR w="9525" cap="flat" cmpd="sng" algn="ctr">
                       <a:solidFill>
-                        <a:srgbClr val="EFD9D1"/>
+                        <a:srgbClr val="F6DED5"/>
                       </a:solidFill>
                       <a:prstDash val="solid"/>
                     </a:lnR>
                     <a:lnT w="9525" cap="flat" cmpd="sng" algn="ctr">
                       <a:solidFill>
-                        <a:srgbClr val="EFD9D1"/>
+                        <a:srgbClr val="F6DED5"/>
                       </a:solidFill>
                       <a:prstDash val="solid"/>
                     </a:lnT>
                     <a:lnB w="9525" cap="flat" cmpd="sng" algn="ctr">
                       <a:solidFill>
-                        <a:srgbClr val="EFD9D1"/>
+                        <a:srgbClr val="F6DED5"/>
                       </a:solidFill>
                       <a:prstDash val="solid"/>
                     </a:lnB>
@@ -5097,7 +5308,7 @@
                       <a:r>
                         <a:rPr sz="1400" b="0">
                           <a:solidFill>
-                            <a:srgbClr val="2B2B2B"/>
+                            <a:srgbClr val="26231F"/>
                           </a:solidFill>
                         </a:rPr>
                         <a:t/>
@@ -5107,30 +5318,30 @@
                   <a:tcPr anchor="ctr" marL="73152" marR="73152">
                     <a:lnL w="9525" cap="flat" cmpd="sng" algn="ctr">
                       <a:solidFill>
-                        <a:srgbClr val="EFD9D1"/>
+                        <a:srgbClr val="F6DED5"/>
                       </a:solidFill>
                       <a:prstDash val="solid"/>
                     </a:lnL>
                     <a:lnR w="9525" cap="flat" cmpd="sng" algn="ctr">
                       <a:solidFill>
-                        <a:srgbClr val="EFD9D1"/>
+                        <a:srgbClr val="F6DED5"/>
                       </a:solidFill>
                       <a:prstDash val="solid"/>
                     </a:lnR>
                     <a:lnT w="9525" cap="flat" cmpd="sng" algn="ctr">
                       <a:solidFill>
-                        <a:srgbClr val="EFD9D1"/>
+                        <a:srgbClr val="F6DED5"/>
                       </a:solidFill>
                       <a:prstDash val="solid"/>
                     </a:lnT>
                     <a:lnB w="9525" cap="flat" cmpd="sng" algn="ctr">
                       <a:solidFill>
-                        <a:srgbClr val="EFD9D1"/>
+                        <a:srgbClr val="F6DED5"/>
                       </a:solidFill>
                       <a:prstDash val="solid"/>
                     </a:lnB>
                     <a:solidFill>
-                      <a:srgbClr val="F9F3F0"/>
+                      <a:srgbClr val="FBF0EC"/>
                     </a:solidFill>
                   </a:tcPr>
                 </a:tc>
@@ -5143,7 +5354,7 @@
                       <a:r>
                         <a:rPr sz="1400" b="0">
                           <a:solidFill>
-                            <a:srgbClr val="2B2B2B"/>
+                            <a:srgbClr val="26231F"/>
                           </a:solidFill>
                         </a:rPr>
                         <a:t/>
@@ -5153,30 +5364,30 @@
                   <a:tcPr anchor="ctr" marL="73152" marR="73152">
                     <a:lnL w="9525" cap="flat" cmpd="sng" algn="ctr">
                       <a:solidFill>
-                        <a:srgbClr val="EFD9D1"/>
+                        <a:srgbClr val="F6DED5"/>
                       </a:solidFill>
                       <a:prstDash val="solid"/>
                     </a:lnL>
                     <a:lnR w="9525" cap="flat" cmpd="sng" algn="ctr">
                       <a:solidFill>
-                        <a:srgbClr val="EFD9D1"/>
+                        <a:srgbClr val="F6DED5"/>
                       </a:solidFill>
                       <a:prstDash val="solid"/>
                     </a:lnR>
                     <a:lnT w="9525" cap="flat" cmpd="sng" algn="ctr">
                       <a:solidFill>
-                        <a:srgbClr val="EFD9D1"/>
+                        <a:srgbClr val="F6DED5"/>
                       </a:solidFill>
                       <a:prstDash val="solid"/>
                     </a:lnT>
                     <a:lnB w="9525" cap="flat" cmpd="sng" algn="ctr">
                       <a:solidFill>
-                        <a:srgbClr val="EFD9D1"/>
+                        <a:srgbClr val="F6DED5"/>
                       </a:solidFill>
                       <a:prstDash val="solid"/>
                     </a:lnB>
                     <a:solidFill>
-                      <a:srgbClr val="F9F3F0"/>
+                      <a:srgbClr val="FBF0EC"/>
                     </a:solidFill>
                   </a:tcPr>
                 </a:tc>
@@ -5189,7 +5400,7 @@
                       <a:r>
                         <a:rPr sz="1400" b="0">
                           <a:solidFill>
-                            <a:srgbClr val="2B2B2B"/>
+                            <a:srgbClr val="26231F"/>
                           </a:solidFill>
                         </a:rPr>
                         <a:t/>
@@ -5199,30 +5410,30 @@
                   <a:tcPr anchor="ctr" marL="73152" marR="73152">
                     <a:lnL w="9525" cap="flat" cmpd="sng" algn="ctr">
                       <a:solidFill>
-                        <a:srgbClr val="EFD9D1"/>
+                        <a:srgbClr val="F6DED5"/>
                       </a:solidFill>
                       <a:prstDash val="solid"/>
                     </a:lnL>
                     <a:lnR w="9525" cap="flat" cmpd="sng" algn="ctr">
                       <a:solidFill>
-                        <a:srgbClr val="EFD9D1"/>
+                        <a:srgbClr val="F6DED5"/>
                       </a:solidFill>
                       <a:prstDash val="solid"/>
                     </a:lnR>
                     <a:lnT w="9525" cap="flat" cmpd="sng" algn="ctr">
                       <a:solidFill>
-                        <a:srgbClr val="EFD9D1"/>
+                        <a:srgbClr val="F6DED5"/>
                       </a:solidFill>
                       <a:prstDash val="solid"/>
                     </a:lnT>
                     <a:lnB w="9525" cap="flat" cmpd="sng" algn="ctr">
                       <a:solidFill>
-                        <a:srgbClr val="EFD9D1"/>
+                        <a:srgbClr val="F6DED5"/>
                       </a:solidFill>
                       <a:prstDash val="solid"/>
                     </a:lnB>
                     <a:solidFill>
-                      <a:srgbClr val="F9F3F0"/>
+                      <a:srgbClr val="FBF0EC"/>
                     </a:solidFill>
                   </a:tcPr>
                 </a:tc>
@@ -5235,7 +5446,7 @@
                       <a:r>
                         <a:rPr sz="1400" b="0">
                           <a:solidFill>
-                            <a:srgbClr val="2B2B2B"/>
+                            <a:srgbClr val="26231F"/>
                           </a:solidFill>
                         </a:rPr>
                         <a:t/>
@@ -5245,30 +5456,30 @@
                   <a:tcPr anchor="ctr" marL="73152" marR="73152">
                     <a:lnL w="9525" cap="flat" cmpd="sng" algn="ctr">
                       <a:solidFill>
-                        <a:srgbClr val="EFD9D1"/>
+                        <a:srgbClr val="F6DED5"/>
                       </a:solidFill>
                       <a:prstDash val="solid"/>
                     </a:lnL>
                     <a:lnR w="9525" cap="flat" cmpd="sng" algn="ctr">
                       <a:solidFill>
-                        <a:srgbClr val="EFD9D1"/>
+                        <a:srgbClr val="F6DED5"/>
                       </a:solidFill>
                       <a:prstDash val="solid"/>
                     </a:lnR>
                     <a:lnT w="9525" cap="flat" cmpd="sng" algn="ctr">
                       <a:solidFill>
-                        <a:srgbClr val="EFD9D1"/>
+                        <a:srgbClr val="F6DED5"/>
                       </a:solidFill>
                       <a:prstDash val="solid"/>
                     </a:lnT>
                     <a:lnB w="9525" cap="flat" cmpd="sng" algn="ctr">
                       <a:solidFill>
-                        <a:srgbClr val="EFD9D1"/>
+                        <a:srgbClr val="F6DED5"/>
                       </a:solidFill>
                       <a:prstDash val="solid"/>
                     </a:lnB>
                     <a:solidFill>
-                      <a:srgbClr val="F9F3F0"/>
+                      <a:srgbClr val="FBF0EC"/>
                     </a:solidFill>
                   </a:tcPr>
                 </a:tc>
@@ -5281,7 +5492,7 @@
                       <a:r>
                         <a:rPr sz="1400" b="0">
                           <a:solidFill>
-                            <a:srgbClr val="2B2B2B"/>
+                            <a:srgbClr val="26231F"/>
                           </a:solidFill>
                         </a:rPr>
                         <a:t/>
@@ -5291,30 +5502,30 @@
                   <a:tcPr anchor="ctr" marL="73152" marR="73152">
                     <a:lnL w="9525" cap="flat" cmpd="sng" algn="ctr">
                       <a:solidFill>
-                        <a:srgbClr val="EFD9D1"/>
+                        <a:srgbClr val="F6DED5"/>
                       </a:solidFill>
                       <a:prstDash val="solid"/>
                     </a:lnL>
                     <a:lnR w="9525" cap="flat" cmpd="sng" algn="ctr">
                       <a:solidFill>
-                        <a:srgbClr val="EFD9D1"/>
+                        <a:srgbClr val="F6DED5"/>
                       </a:solidFill>
                       <a:prstDash val="solid"/>
                     </a:lnR>
                     <a:lnT w="9525" cap="flat" cmpd="sng" algn="ctr">
                       <a:solidFill>
-                        <a:srgbClr val="EFD9D1"/>
+                        <a:srgbClr val="F6DED5"/>
                       </a:solidFill>
                       <a:prstDash val="solid"/>
                     </a:lnT>
                     <a:lnB w="9525" cap="flat" cmpd="sng" algn="ctr">
                       <a:solidFill>
-                        <a:srgbClr val="EFD9D1"/>
+                        <a:srgbClr val="F6DED5"/>
                       </a:solidFill>
                       <a:prstDash val="solid"/>
                     </a:lnB>
                     <a:solidFill>
-                      <a:srgbClr val="F9F3F0"/>
+                      <a:srgbClr val="FBF0EC"/>
                     </a:solidFill>
                   </a:tcPr>
                 </a:tc>
@@ -5329,7 +5540,7 @@
                       <a:r>
                         <a:rPr sz="1400" b="0">
                           <a:solidFill>
-                            <a:srgbClr val="2B2B2B"/>
+                            <a:srgbClr val="26231F"/>
                           </a:solidFill>
                         </a:rPr>
                         <a:t/>
@@ -5339,25 +5550,25 @@
                   <a:tcPr anchor="ctr" marL="73152" marR="73152">
                     <a:lnL w="9525" cap="flat" cmpd="sng" algn="ctr">
                       <a:solidFill>
-                        <a:srgbClr val="EFD9D1"/>
+                        <a:srgbClr val="F6DED5"/>
                       </a:solidFill>
                       <a:prstDash val="solid"/>
                     </a:lnL>
                     <a:lnR w="9525" cap="flat" cmpd="sng" algn="ctr">
                       <a:solidFill>
-                        <a:srgbClr val="EFD9D1"/>
+                        <a:srgbClr val="F6DED5"/>
                       </a:solidFill>
                       <a:prstDash val="solid"/>
                     </a:lnR>
                     <a:lnT w="9525" cap="flat" cmpd="sng" algn="ctr">
                       <a:solidFill>
-                        <a:srgbClr val="EFD9D1"/>
+                        <a:srgbClr val="F6DED5"/>
                       </a:solidFill>
                       <a:prstDash val="solid"/>
                     </a:lnT>
                     <a:lnB w="9525" cap="flat" cmpd="sng" algn="ctr">
                       <a:solidFill>
-                        <a:srgbClr val="EFD9D1"/>
+                        <a:srgbClr val="F6DED5"/>
                       </a:solidFill>
                       <a:prstDash val="solid"/>
                     </a:lnB>
@@ -5375,7 +5586,7 @@
                       <a:r>
                         <a:rPr sz="1400" b="0">
                           <a:solidFill>
-                            <a:srgbClr val="2B2B2B"/>
+                            <a:srgbClr val="26231F"/>
                           </a:solidFill>
                         </a:rPr>
                         <a:t/>
@@ -5385,25 +5596,25 @@
                   <a:tcPr anchor="ctr" marL="73152" marR="73152">
                     <a:lnL w="9525" cap="flat" cmpd="sng" algn="ctr">
                       <a:solidFill>
-                        <a:srgbClr val="EFD9D1"/>
+                        <a:srgbClr val="F6DED5"/>
                       </a:solidFill>
                       <a:prstDash val="solid"/>
                     </a:lnL>
                     <a:lnR w="9525" cap="flat" cmpd="sng" algn="ctr">
                       <a:solidFill>
-                        <a:srgbClr val="EFD9D1"/>
+                        <a:srgbClr val="F6DED5"/>
                       </a:solidFill>
                       <a:prstDash val="solid"/>
                     </a:lnR>
                     <a:lnT w="9525" cap="flat" cmpd="sng" algn="ctr">
                       <a:solidFill>
-                        <a:srgbClr val="EFD9D1"/>
+                        <a:srgbClr val="F6DED5"/>
                       </a:solidFill>
                       <a:prstDash val="solid"/>
                     </a:lnT>
                     <a:lnB w="9525" cap="flat" cmpd="sng" algn="ctr">
                       <a:solidFill>
-                        <a:srgbClr val="EFD9D1"/>
+                        <a:srgbClr val="F6DED5"/>
                       </a:solidFill>
                       <a:prstDash val="solid"/>
                     </a:lnB>
@@ -5421,7 +5632,7 @@
                       <a:r>
                         <a:rPr sz="1400" b="0">
                           <a:solidFill>
-                            <a:srgbClr val="2B2B2B"/>
+                            <a:srgbClr val="26231F"/>
                           </a:solidFill>
                         </a:rPr>
                         <a:t/>
@@ -5431,25 +5642,25 @@
                   <a:tcPr anchor="ctr" marL="73152" marR="73152">
                     <a:lnL w="9525" cap="flat" cmpd="sng" algn="ctr">
                       <a:solidFill>
-                        <a:srgbClr val="EFD9D1"/>
+                        <a:srgbClr val="F6DED5"/>
                       </a:solidFill>
                       <a:prstDash val="solid"/>
                     </a:lnL>
                     <a:lnR w="9525" cap="flat" cmpd="sng" algn="ctr">
                       <a:solidFill>
-                        <a:srgbClr val="EFD9D1"/>
+                        <a:srgbClr val="F6DED5"/>
                       </a:solidFill>
                       <a:prstDash val="solid"/>
                     </a:lnR>
                     <a:lnT w="9525" cap="flat" cmpd="sng" algn="ctr">
                       <a:solidFill>
-                        <a:srgbClr val="EFD9D1"/>
+                        <a:srgbClr val="F6DED5"/>
                       </a:solidFill>
                       <a:prstDash val="solid"/>
                     </a:lnT>
                     <a:lnB w="9525" cap="flat" cmpd="sng" algn="ctr">
                       <a:solidFill>
-                        <a:srgbClr val="EFD9D1"/>
+                        <a:srgbClr val="F6DED5"/>
                       </a:solidFill>
                       <a:prstDash val="solid"/>
                     </a:lnB>
@@ -5467,7 +5678,7 @@
                       <a:r>
                         <a:rPr sz="1400" b="0">
                           <a:solidFill>
-                            <a:srgbClr val="2B2B2B"/>
+                            <a:srgbClr val="26231F"/>
                           </a:solidFill>
                         </a:rPr>
                         <a:t/>
@@ -5477,25 +5688,25 @@
                   <a:tcPr anchor="ctr" marL="73152" marR="73152">
                     <a:lnL w="9525" cap="flat" cmpd="sng" algn="ctr">
                       <a:solidFill>
-                        <a:srgbClr val="EFD9D1"/>
+                        <a:srgbClr val="F6DED5"/>
                       </a:solidFill>
                       <a:prstDash val="solid"/>
                     </a:lnL>
                     <a:lnR w="9525" cap="flat" cmpd="sng" algn="ctr">
                       <a:solidFill>
-                        <a:srgbClr val="EFD9D1"/>
+                        <a:srgbClr val="F6DED5"/>
                       </a:solidFill>
                       <a:prstDash val="solid"/>
                     </a:lnR>
                     <a:lnT w="9525" cap="flat" cmpd="sng" algn="ctr">
                       <a:solidFill>
-                        <a:srgbClr val="EFD9D1"/>
+                        <a:srgbClr val="F6DED5"/>
                       </a:solidFill>
                       <a:prstDash val="solid"/>
                     </a:lnT>
                     <a:lnB w="9525" cap="flat" cmpd="sng" algn="ctr">
                       <a:solidFill>
-                        <a:srgbClr val="EFD9D1"/>
+                        <a:srgbClr val="F6DED5"/>
                       </a:solidFill>
                       <a:prstDash val="solid"/>
                     </a:lnB>
@@ -5513,7 +5724,7 @@
                       <a:r>
                         <a:rPr sz="1400" b="0">
                           <a:solidFill>
-                            <a:srgbClr val="2B2B2B"/>
+                            <a:srgbClr val="26231F"/>
                           </a:solidFill>
                         </a:rPr>
                         <a:t/>
@@ -5523,25 +5734,25 @@
                   <a:tcPr anchor="ctr" marL="73152" marR="73152">
                     <a:lnL w="9525" cap="flat" cmpd="sng" algn="ctr">
                       <a:solidFill>
-                        <a:srgbClr val="EFD9D1"/>
+                        <a:srgbClr val="F6DED5"/>
                       </a:solidFill>
                       <a:prstDash val="solid"/>
                     </a:lnL>
                     <a:lnR w="9525" cap="flat" cmpd="sng" algn="ctr">
                       <a:solidFill>
-                        <a:srgbClr val="EFD9D1"/>
+                        <a:srgbClr val="F6DED5"/>
                       </a:solidFill>
                       <a:prstDash val="solid"/>
                     </a:lnR>
                     <a:lnT w="9525" cap="flat" cmpd="sng" algn="ctr">
                       <a:solidFill>
-                        <a:srgbClr val="EFD9D1"/>
+                        <a:srgbClr val="F6DED5"/>
                       </a:solidFill>
                       <a:prstDash val="solid"/>
                     </a:lnT>
                     <a:lnB w="9525" cap="flat" cmpd="sng" algn="ctr">
                       <a:solidFill>
-                        <a:srgbClr val="EFD9D1"/>
+                        <a:srgbClr val="F6DED5"/>
                       </a:solidFill>
                       <a:prstDash val="solid"/>
                     </a:lnB>
@@ -5561,7 +5772,7 @@
                       <a:r>
                         <a:rPr sz="1400" b="0">
                           <a:solidFill>
-                            <a:srgbClr val="2B2B2B"/>
+                            <a:srgbClr val="26231F"/>
                           </a:solidFill>
                         </a:rPr>
                         <a:t/>
@@ -5571,30 +5782,30 @@
                   <a:tcPr anchor="ctr" marL="73152" marR="73152">
                     <a:lnL w="9525" cap="flat" cmpd="sng" algn="ctr">
                       <a:solidFill>
-                        <a:srgbClr val="EFD9D1"/>
+                        <a:srgbClr val="F6DED5"/>
                       </a:solidFill>
                       <a:prstDash val="solid"/>
                     </a:lnL>
                     <a:lnR w="9525" cap="flat" cmpd="sng" algn="ctr">
                       <a:solidFill>
-                        <a:srgbClr val="EFD9D1"/>
+                        <a:srgbClr val="F6DED5"/>
                       </a:solidFill>
                       <a:prstDash val="solid"/>
                     </a:lnR>
                     <a:lnT w="9525" cap="flat" cmpd="sng" algn="ctr">
                       <a:solidFill>
-                        <a:srgbClr val="EFD9D1"/>
+                        <a:srgbClr val="F6DED5"/>
                       </a:solidFill>
                       <a:prstDash val="solid"/>
                     </a:lnT>
                     <a:lnB w="9525" cap="flat" cmpd="sng" algn="ctr">
                       <a:solidFill>
-                        <a:srgbClr val="EFD9D1"/>
+                        <a:srgbClr val="F6DED5"/>
                       </a:solidFill>
                       <a:prstDash val="solid"/>
                     </a:lnB>
                     <a:solidFill>
-                      <a:srgbClr val="F9F3F0"/>
+                      <a:srgbClr val="FBF0EC"/>
                     </a:solidFill>
                   </a:tcPr>
                 </a:tc>
@@ -5607,7 +5818,7 @@
                       <a:r>
                         <a:rPr sz="1400" b="0">
                           <a:solidFill>
-                            <a:srgbClr val="2B2B2B"/>
+                            <a:srgbClr val="26231F"/>
                           </a:solidFill>
                         </a:rPr>
                         <a:t/>
@@ -5617,30 +5828,30 @@
                   <a:tcPr anchor="ctr" marL="73152" marR="73152">
                     <a:lnL w="9525" cap="flat" cmpd="sng" algn="ctr">
                       <a:solidFill>
-                        <a:srgbClr val="EFD9D1"/>
+                        <a:srgbClr val="F6DED5"/>
                       </a:solidFill>
                       <a:prstDash val="solid"/>
                     </a:lnL>
                     <a:lnR w="9525" cap="flat" cmpd="sng" algn="ctr">
                       <a:solidFill>
-                        <a:srgbClr val="EFD9D1"/>
+                        <a:srgbClr val="F6DED5"/>
                       </a:solidFill>
                       <a:prstDash val="solid"/>
                     </a:lnR>
                     <a:lnT w="9525" cap="flat" cmpd="sng" algn="ctr">
                       <a:solidFill>
-                        <a:srgbClr val="EFD9D1"/>
+                        <a:srgbClr val="F6DED5"/>
                       </a:solidFill>
                       <a:prstDash val="solid"/>
                     </a:lnT>
                     <a:lnB w="9525" cap="flat" cmpd="sng" algn="ctr">
                       <a:solidFill>
-                        <a:srgbClr val="EFD9D1"/>
+                        <a:srgbClr val="F6DED5"/>
                       </a:solidFill>
                       <a:prstDash val="solid"/>
                     </a:lnB>
                     <a:solidFill>
-                      <a:srgbClr val="F9F3F0"/>
+                      <a:srgbClr val="FBF0EC"/>
                     </a:solidFill>
                   </a:tcPr>
                 </a:tc>
@@ -5653,7 +5864,7 @@
                       <a:r>
                         <a:rPr sz="1400" b="0">
                           <a:solidFill>
-                            <a:srgbClr val="2B2B2B"/>
+                            <a:srgbClr val="26231F"/>
                           </a:solidFill>
                         </a:rPr>
                         <a:t/>
@@ -5663,30 +5874,30 @@
                   <a:tcPr anchor="ctr" marL="73152" marR="73152">
                     <a:lnL w="9525" cap="flat" cmpd="sng" algn="ctr">
                       <a:solidFill>
-                        <a:srgbClr val="EFD9D1"/>
+                        <a:srgbClr val="F6DED5"/>
                       </a:solidFill>
                       <a:prstDash val="solid"/>
                     </a:lnL>
                     <a:lnR w="9525" cap="flat" cmpd="sng" algn="ctr">
                       <a:solidFill>
-                        <a:srgbClr val="EFD9D1"/>
+                        <a:srgbClr val="F6DED5"/>
                       </a:solidFill>
                       <a:prstDash val="solid"/>
                     </a:lnR>
                     <a:lnT w="9525" cap="flat" cmpd="sng" algn="ctr">
                       <a:solidFill>
-                        <a:srgbClr val="EFD9D1"/>
+                        <a:srgbClr val="F6DED5"/>
                       </a:solidFill>
                       <a:prstDash val="solid"/>
                     </a:lnT>
                     <a:lnB w="9525" cap="flat" cmpd="sng" algn="ctr">
                       <a:solidFill>
-                        <a:srgbClr val="EFD9D1"/>
+                        <a:srgbClr val="F6DED5"/>
                       </a:solidFill>
                       <a:prstDash val="solid"/>
                     </a:lnB>
                     <a:solidFill>
-                      <a:srgbClr val="F9F3F0"/>
+                      <a:srgbClr val="FBF0EC"/>
                     </a:solidFill>
                   </a:tcPr>
                 </a:tc>
@@ -5699,7 +5910,7 @@
                       <a:r>
                         <a:rPr sz="1400" b="0">
                           <a:solidFill>
-                            <a:srgbClr val="2B2B2B"/>
+                            <a:srgbClr val="26231F"/>
                           </a:solidFill>
                         </a:rPr>
                         <a:t/>
@@ -5709,30 +5920,30 @@
                   <a:tcPr anchor="ctr" marL="73152" marR="73152">
                     <a:lnL w="9525" cap="flat" cmpd="sng" algn="ctr">
                       <a:solidFill>
-                        <a:srgbClr val="EFD9D1"/>
+                        <a:srgbClr val="F6DED5"/>
                       </a:solidFill>
                       <a:prstDash val="solid"/>
                     </a:lnL>
                     <a:lnR w="9525" cap="flat" cmpd="sng" algn="ctr">
                       <a:solidFill>
-                        <a:srgbClr val="EFD9D1"/>
+                        <a:srgbClr val="F6DED5"/>
                       </a:solidFill>
                       <a:prstDash val="solid"/>
                     </a:lnR>
                     <a:lnT w="9525" cap="flat" cmpd="sng" algn="ctr">
                       <a:solidFill>
-                        <a:srgbClr val="EFD9D1"/>
+                        <a:srgbClr val="F6DED5"/>
                       </a:solidFill>
                       <a:prstDash val="solid"/>
                     </a:lnT>
                     <a:lnB w="9525" cap="flat" cmpd="sng" algn="ctr">
                       <a:solidFill>
-                        <a:srgbClr val="EFD9D1"/>
+                        <a:srgbClr val="F6DED5"/>
                       </a:solidFill>
                       <a:prstDash val="solid"/>
                     </a:lnB>
                     <a:solidFill>
-                      <a:srgbClr val="F9F3F0"/>
+                      <a:srgbClr val="FBF0EC"/>
                     </a:solidFill>
                   </a:tcPr>
                 </a:tc>
@@ -5745,7 +5956,7 @@
                       <a:r>
                         <a:rPr sz="1400" b="0">
                           <a:solidFill>
-                            <a:srgbClr val="2B2B2B"/>
+                            <a:srgbClr val="26231F"/>
                           </a:solidFill>
                         </a:rPr>
                         <a:t/>
@@ -5755,30 +5966,30 @@
                   <a:tcPr anchor="ctr" marL="73152" marR="73152">
                     <a:lnL w="9525" cap="flat" cmpd="sng" algn="ctr">
                       <a:solidFill>
-                        <a:srgbClr val="EFD9D1"/>
+                        <a:srgbClr val="F6DED5"/>
                       </a:solidFill>
                       <a:prstDash val="solid"/>
                     </a:lnL>
                     <a:lnR w="9525" cap="flat" cmpd="sng" algn="ctr">
                       <a:solidFill>
-                        <a:srgbClr val="EFD9D1"/>
+                        <a:srgbClr val="F6DED5"/>
                       </a:solidFill>
                       <a:prstDash val="solid"/>
                     </a:lnR>
                     <a:lnT w="9525" cap="flat" cmpd="sng" algn="ctr">
                       <a:solidFill>
-                        <a:srgbClr val="EFD9D1"/>
+                        <a:srgbClr val="F6DED5"/>
                       </a:solidFill>
                       <a:prstDash val="solid"/>
                     </a:lnT>
                     <a:lnB w="9525" cap="flat" cmpd="sng" algn="ctr">
                       <a:solidFill>
-                        <a:srgbClr val="EFD9D1"/>
+                        <a:srgbClr val="F6DED5"/>
                       </a:solidFill>
                       <a:prstDash val="solid"/>
                     </a:lnB>
                     <a:solidFill>
-                      <a:srgbClr val="F9F3F0"/>
+                      <a:srgbClr val="FBF0EC"/>
                     </a:solidFill>
                   </a:tcPr>
                 </a:tc>
@@ -5801,7 +6012,7 @@
     <p:bg>
       <p:bgPr>
         <a:solidFill>
-          <a:srgbClr val="EFD9D1"/>
+          <a:srgbClr val="F6DED5"/>
         </a:solidFill>
         <a:effectLst/>
       </p:bgPr>
@@ -5821,20 +6032,84 @@
         </p:nvSpPr>
         <p:spPr>
           <a:xfrm>
-            <a:off x="274320" y="274320"/>
-            <a:ext cx="11643055" cy="6309360"/>
+            <a:off x="640080" y="566928"/>
+            <a:ext cx="10911535" cy="10972"/>
           </a:xfrm>
           <a:prstGeom prst="rect">
             <a:avLst/>
           </a:prstGeom>
           <a:solidFill>
-            <a:srgbClr val="FFFFFF"/>
+            <a:srgbClr val="26231F"/>
           </a:solidFill>
-          <a:ln w="25400">
-            <a:solidFill>
-              <a:srgbClr val="7D4531"/>
-            </a:solidFill>
-            <a:prstDash val="dash"/>
+          <a:ln>
+            <a:noFill/>
+          </a:ln>
+        </p:spPr>
+        <p:txBody>
+          <a:bodyPr rtlCol="0" anchor="ctr"/>
+          <a:lstStyle/>
+          <a:p>
+            <a:pPr algn="ctr"/>
+          </a:p>
+        </p:txBody>
+      </p:sp>
+      <p:sp>
+        <p:nvSpPr>
+          <p:cNvPr id="4" name="상단 라벨"/>
+          <p:cNvSpPr txBox="1"/>
+          <p:nvPr/>
+        </p:nvSpPr>
+        <p:spPr>
+          <a:xfrm>
+            <a:off x="640080" y="237744"/>
+            <a:ext cx="5486400" cy="274320"/>
+          </a:xfrm>
+          <a:prstGeom prst="rect">
+            <a:avLst/>
+          </a:prstGeom>
+          <a:noFill/>
+        </p:spPr>
+        <p:txBody>
+          <a:bodyPr wrap="square" lIns="54864" rIns="54864" tIns="27432" bIns="27432" anchor="ctr">
+            <a:noAutofit/>
+          </a:bodyPr>
+          <a:lstStyle/>
+          <a:p>
+            <a:pPr algn="l">
+              <a:lnSpc>
+                <a:spcPct val="115000"/>
+              </a:lnSpc>
+            </a:pPr>
+            <a:r>
+              <a:rPr sz="900" b="1" i="0" spc="250">
+                <a:solidFill>
+                  <a:srgbClr val="26231F"/>
+                </a:solidFill>
+              </a:rPr>
+              <a:t>INSURANCE CHECK</a:t>
+            </a:r>
+          </a:p>
+        </p:txBody>
+      </p:sp>
+      <p:sp>
+        <p:nvSpPr>
+          <p:cNvPr id="5" name="포인트"/>
+          <p:cNvSpPr/>
+          <p:nvPr/>
+        </p:nvSpPr>
+        <p:spPr>
+          <a:xfrm>
+            <a:off x="11204143" y="246888"/>
+            <a:ext cx="237744" cy="237744"/>
+          </a:xfrm>
+          <a:prstGeom prst="moon">
+            <a:avLst/>
+          </a:prstGeom>
+          <a:solidFill>
+            <a:srgbClr val="E1AC98"/>
+          </a:solidFill>
+          <a:ln>
+            <a:noFill/>
           </a:ln>
         </p:spPr>
         <p:txBody>
@@ -5857,8 +6132,8 @@
         </p:nvSpPr>
         <p:spPr>
           <a:xfrm>
-            <a:off x="777240" y="548640"/>
-            <a:ext cx="9357055" cy="822960"/>
+            <a:off x="640080" y="731520"/>
+            <a:ext cx="10911535" cy="822960"/>
           </a:xfrm>
         </p:spPr>
         <p:txBody>
@@ -5875,7 +6150,7 @@
             <a:r>
               <a:rPr sz="3000" b="1" i="0">
                 <a:solidFill>
-                  <a:srgbClr val="3B2017"/>
+                  <a:srgbClr val="26231F"/>
                 </a:solidFill>
               </a:rPr>
               <a:t>보장 항목 체크</a:t>
@@ -5885,15 +6160,15 @@
       </p:sp>
       <p:graphicFrame>
         <p:nvGraphicFramePr>
-          <p:cNvPr id="4" name="표"/>
+          <p:cNvPr id="6" name="표"/>
           <p:cNvGraphicFramePr>
             <a:graphicFrameLocks noGrp="1"/>
           </p:cNvGraphicFramePr>
           <p:nvPr/>
         </p:nvGraphicFramePr>
         <p:xfrm>
-          <a:off x="777240" y="1554480"/>
-          <a:ext cx="10637214" cy="4773168"/>
+          <a:off x="640080" y="1783080"/>
+          <a:ext cx="10911534" cy="4773168"/>
         </p:xfrm>
         <a:graphic>
           <a:graphicData uri="http://schemas.openxmlformats.org/drawingml/2006/table">
@@ -5903,9 +6178,9 @@
               </a:tblPr>
               <a:tblGrid>
                 <a:gridCol w="3657600"/>
-                <a:gridCol w="2326538"/>
-                <a:gridCol w="2326538"/>
-                <a:gridCol w="2326538"/>
+                <a:gridCol w="2417978"/>
+                <a:gridCol w="2417978"/>
+                <a:gridCol w="2417978"/>
               </a:tblGrid>
               <a:tr h="530352">
                 <a:tc>
@@ -5917,7 +6192,7 @@
                       <a:r>
                         <a:rPr sz="1400" b="1">
                           <a:solidFill>
-                            <a:srgbClr val="FFFFFF"/>
+                            <a:srgbClr val="26231F"/>
                           </a:solidFill>
                         </a:rPr>
                         <a:t>보장 항목</a:t>
@@ -5927,30 +6202,30 @@
                   <a:tcPr anchor="ctr" marL="73152" marR="73152">
                     <a:lnL w="9525" cap="flat" cmpd="sng" algn="ctr">
                       <a:solidFill>
-                        <a:srgbClr val="7D4531"/>
+                        <a:srgbClr val="E1AC98"/>
                       </a:solidFill>
                       <a:prstDash val="solid"/>
                     </a:lnL>
                     <a:lnR w="9525" cap="flat" cmpd="sng" algn="ctr">
                       <a:solidFill>
-                        <a:srgbClr val="7D4531"/>
+                        <a:srgbClr val="E1AC98"/>
                       </a:solidFill>
                       <a:prstDash val="solid"/>
                     </a:lnR>
                     <a:lnT w="9525" cap="flat" cmpd="sng" algn="ctr">
                       <a:solidFill>
-                        <a:srgbClr val="7D4531"/>
+                        <a:srgbClr val="E1AC98"/>
                       </a:solidFill>
                       <a:prstDash val="solid"/>
                     </a:lnT>
                     <a:lnB w="9525" cap="flat" cmpd="sng" algn="ctr">
                       <a:solidFill>
-                        <a:srgbClr val="7D4531"/>
+                        <a:srgbClr val="E1AC98"/>
                       </a:solidFill>
                       <a:prstDash val="solid"/>
                     </a:lnB>
                     <a:solidFill>
-                      <a:srgbClr val="7D4531"/>
+                      <a:srgbClr val="E1AC98"/>
                     </a:solidFill>
                   </a:tcPr>
                 </a:tc>
@@ -5963,7 +6238,7 @@
                       <a:r>
                         <a:rPr sz="1400" b="1">
                           <a:solidFill>
-                            <a:srgbClr val="FFFFFF"/>
+                            <a:srgbClr val="26231F"/>
                           </a:solidFill>
                         </a:rPr>
                         <a:t>가입 확인</a:t>
@@ -5973,30 +6248,30 @@
                   <a:tcPr anchor="ctr" marL="73152" marR="73152">
                     <a:lnL w="9525" cap="flat" cmpd="sng" algn="ctr">
                       <a:solidFill>
-                        <a:srgbClr val="7D4531"/>
+                        <a:srgbClr val="E1AC98"/>
                       </a:solidFill>
                       <a:prstDash val="solid"/>
                     </a:lnL>
                     <a:lnR w="9525" cap="flat" cmpd="sng" algn="ctr">
                       <a:solidFill>
-                        <a:srgbClr val="7D4531"/>
+                        <a:srgbClr val="E1AC98"/>
                       </a:solidFill>
                       <a:prstDash val="solid"/>
                     </a:lnR>
                     <a:lnT w="9525" cap="flat" cmpd="sng" algn="ctr">
                       <a:solidFill>
-                        <a:srgbClr val="7D4531"/>
+                        <a:srgbClr val="E1AC98"/>
                       </a:solidFill>
                       <a:prstDash val="solid"/>
                     </a:lnT>
                     <a:lnB w="9525" cap="flat" cmpd="sng" algn="ctr">
                       <a:solidFill>
-                        <a:srgbClr val="7D4531"/>
+                        <a:srgbClr val="E1AC98"/>
                       </a:solidFill>
                       <a:prstDash val="solid"/>
                     </a:lnB>
                     <a:solidFill>
-                      <a:srgbClr val="7D4531"/>
+                      <a:srgbClr val="E1AC98"/>
                     </a:solidFill>
                   </a:tcPr>
                 </a:tc>
@@ -6009,7 +6284,7 @@
                       <a:r>
                         <a:rPr sz="1400" b="1">
                           <a:solidFill>
-                            <a:srgbClr val="FFFFFF"/>
+                            <a:srgbClr val="26231F"/>
                           </a:solidFill>
                         </a:rPr>
                         <a:t>확인 필요</a:t>
@@ -6019,30 +6294,30 @@
                   <a:tcPr anchor="ctr" marL="73152" marR="73152">
                     <a:lnL w="9525" cap="flat" cmpd="sng" algn="ctr">
                       <a:solidFill>
-                        <a:srgbClr val="7D4531"/>
+                        <a:srgbClr val="E1AC98"/>
                       </a:solidFill>
                       <a:prstDash val="solid"/>
                     </a:lnL>
                     <a:lnR w="9525" cap="flat" cmpd="sng" algn="ctr">
                       <a:solidFill>
-                        <a:srgbClr val="7D4531"/>
+                        <a:srgbClr val="E1AC98"/>
                       </a:solidFill>
                       <a:prstDash val="solid"/>
                     </a:lnR>
                     <a:lnT w="9525" cap="flat" cmpd="sng" algn="ctr">
                       <a:solidFill>
-                        <a:srgbClr val="7D4531"/>
+                        <a:srgbClr val="E1AC98"/>
                       </a:solidFill>
                       <a:prstDash val="solid"/>
                     </a:lnT>
                     <a:lnB w="9525" cap="flat" cmpd="sng" algn="ctr">
                       <a:solidFill>
-                        <a:srgbClr val="7D4531"/>
+                        <a:srgbClr val="E1AC98"/>
                       </a:solidFill>
                       <a:prstDash val="solid"/>
                     </a:lnB>
                     <a:solidFill>
-                      <a:srgbClr val="7D4531"/>
+                      <a:srgbClr val="E1AC98"/>
                     </a:solidFill>
                   </a:tcPr>
                 </a:tc>
@@ -6055,7 +6330,7 @@
                       <a:r>
                         <a:rPr sz="1400" b="1">
                           <a:solidFill>
-                            <a:srgbClr val="FFFFFF"/>
+                            <a:srgbClr val="26231F"/>
                           </a:solidFill>
                         </a:rPr>
                         <a:t>해당 없음</a:t>
@@ -6065,30 +6340,30 @@
                   <a:tcPr anchor="ctr" marL="73152" marR="73152">
                     <a:lnL w="9525" cap="flat" cmpd="sng" algn="ctr">
                       <a:solidFill>
-                        <a:srgbClr val="7D4531"/>
+                        <a:srgbClr val="E1AC98"/>
                       </a:solidFill>
                       <a:prstDash val="solid"/>
                     </a:lnL>
                     <a:lnR w="9525" cap="flat" cmpd="sng" algn="ctr">
                       <a:solidFill>
-                        <a:srgbClr val="7D4531"/>
+                        <a:srgbClr val="E1AC98"/>
                       </a:solidFill>
                       <a:prstDash val="solid"/>
                     </a:lnR>
                     <a:lnT w="9525" cap="flat" cmpd="sng" algn="ctr">
                       <a:solidFill>
-                        <a:srgbClr val="7D4531"/>
+                        <a:srgbClr val="E1AC98"/>
                       </a:solidFill>
                       <a:prstDash val="solid"/>
                     </a:lnT>
                     <a:lnB w="9525" cap="flat" cmpd="sng" algn="ctr">
                       <a:solidFill>
-                        <a:srgbClr val="7D4531"/>
+                        <a:srgbClr val="E1AC98"/>
                       </a:solidFill>
                       <a:prstDash val="solid"/>
                     </a:lnB>
                     <a:solidFill>
-                      <a:srgbClr val="7D4531"/>
+                      <a:srgbClr val="E1AC98"/>
                     </a:solidFill>
                   </a:tcPr>
                 </a:tc>
@@ -6103,7 +6378,7 @@
                       <a:r>
                         <a:rPr sz="1400" b="1">
                           <a:solidFill>
-                            <a:srgbClr val="3B2017"/>
+                            <a:srgbClr val="493027"/>
                           </a:solidFill>
                         </a:rPr>
                         <a:t>사망·재해</a:t>
@@ -6113,30 +6388,30 @@
                   <a:tcPr anchor="ctr" marL="73152" marR="73152">
                     <a:lnL w="9525" cap="flat" cmpd="sng" algn="ctr">
                       <a:solidFill>
-                        <a:srgbClr val="EFD9D1"/>
+                        <a:srgbClr val="F6DED5"/>
                       </a:solidFill>
                       <a:prstDash val="solid"/>
                     </a:lnL>
                     <a:lnR w="9525" cap="flat" cmpd="sng" algn="ctr">
                       <a:solidFill>
-                        <a:srgbClr val="EFD9D1"/>
+                        <a:srgbClr val="F6DED5"/>
                       </a:solidFill>
                       <a:prstDash val="solid"/>
                     </a:lnR>
                     <a:lnT w="9525" cap="flat" cmpd="sng" algn="ctr">
                       <a:solidFill>
-                        <a:srgbClr val="EFD9D1"/>
+                        <a:srgbClr val="F6DED5"/>
                       </a:solidFill>
                       <a:prstDash val="solid"/>
                     </a:lnT>
                     <a:lnB w="9525" cap="flat" cmpd="sng" algn="ctr">
                       <a:solidFill>
-                        <a:srgbClr val="EFD9D1"/>
+                        <a:srgbClr val="F6DED5"/>
                       </a:solidFill>
                       <a:prstDash val="solid"/>
                     </a:lnB>
                     <a:solidFill>
-                      <a:srgbClr val="EFD9D1"/>
+                      <a:srgbClr val="F6DED5"/>
                     </a:solidFill>
                   </a:tcPr>
                 </a:tc>
@@ -6149,7 +6424,7 @@
                       <a:r>
                         <a:rPr sz="1400" b="0">
                           <a:solidFill>
-                            <a:srgbClr val="2B2B2B"/>
+                            <a:srgbClr val="26231F"/>
                           </a:solidFill>
                         </a:rPr>
                         <a:t>□</a:t>
@@ -6159,25 +6434,25 @@
                   <a:tcPr anchor="ctr" marL="73152" marR="73152">
                     <a:lnL w="9525" cap="flat" cmpd="sng" algn="ctr">
                       <a:solidFill>
-                        <a:srgbClr val="EFD9D1"/>
+                        <a:srgbClr val="F6DED5"/>
                       </a:solidFill>
                       <a:prstDash val="solid"/>
                     </a:lnL>
                     <a:lnR w="9525" cap="flat" cmpd="sng" algn="ctr">
                       <a:solidFill>
-                        <a:srgbClr val="EFD9D1"/>
+                        <a:srgbClr val="F6DED5"/>
                       </a:solidFill>
                       <a:prstDash val="solid"/>
                     </a:lnR>
                     <a:lnT w="9525" cap="flat" cmpd="sng" algn="ctr">
                       <a:solidFill>
-                        <a:srgbClr val="EFD9D1"/>
+                        <a:srgbClr val="F6DED5"/>
                       </a:solidFill>
                       <a:prstDash val="solid"/>
                     </a:lnT>
                     <a:lnB w="9525" cap="flat" cmpd="sng" algn="ctr">
                       <a:solidFill>
-                        <a:srgbClr val="EFD9D1"/>
+                        <a:srgbClr val="F6DED5"/>
                       </a:solidFill>
                       <a:prstDash val="solid"/>
                     </a:lnB>
@@ -6195,7 +6470,7 @@
                       <a:r>
                         <a:rPr sz="1400" b="0">
                           <a:solidFill>
-                            <a:srgbClr val="2B2B2B"/>
+                            <a:srgbClr val="26231F"/>
                           </a:solidFill>
                         </a:rPr>
                         <a:t>□</a:t>
@@ -6205,25 +6480,25 @@
                   <a:tcPr anchor="ctr" marL="73152" marR="73152">
                     <a:lnL w="9525" cap="flat" cmpd="sng" algn="ctr">
                       <a:solidFill>
-                        <a:srgbClr val="EFD9D1"/>
+                        <a:srgbClr val="F6DED5"/>
                       </a:solidFill>
                       <a:prstDash val="solid"/>
                     </a:lnL>
                     <a:lnR w="9525" cap="flat" cmpd="sng" algn="ctr">
                       <a:solidFill>
-                        <a:srgbClr val="EFD9D1"/>
+                        <a:srgbClr val="F6DED5"/>
                       </a:solidFill>
                       <a:prstDash val="solid"/>
                     </a:lnR>
                     <a:lnT w="9525" cap="flat" cmpd="sng" algn="ctr">
                       <a:solidFill>
-                        <a:srgbClr val="EFD9D1"/>
+                        <a:srgbClr val="F6DED5"/>
                       </a:solidFill>
                       <a:prstDash val="solid"/>
                     </a:lnT>
                     <a:lnB w="9525" cap="flat" cmpd="sng" algn="ctr">
                       <a:solidFill>
-                        <a:srgbClr val="EFD9D1"/>
+                        <a:srgbClr val="F6DED5"/>
                       </a:solidFill>
                       <a:prstDash val="solid"/>
                     </a:lnB>
@@ -6241,7 +6516,7 @@
                       <a:r>
                         <a:rPr sz="1400" b="0">
                           <a:solidFill>
-                            <a:srgbClr val="2B2B2B"/>
+                            <a:srgbClr val="26231F"/>
                           </a:solidFill>
                         </a:rPr>
                         <a:t>□</a:t>
@@ -6251,25 +6526,25 @@
                   <a:tcPr anchor="ctr" marL="73152" marR="73152">
                     <a:lnL w="9525" cap="flat" cmpd="sng" algn="ctr">
                       <a:solidFill>
-                        <a:srgbClr val="EFD9D1"/>
+                        <a:srgbClr val="F6DED5"/>
                       </a:solidFill>
                       <a:prstDash val="solid"/>
                     </a:lnL>
                     <a:lnR w="9525" cap="flat" cmpd="sng" algn="ctr">
                       <a:solidFill>
-                        <a:srgbClr val="EFD9D1"/>
+                        <a:srgbClr val="F6DED5"/>
                       </a:solidFill>
                       <a:prstDash val="solid"/>
                     </a:lnR>
                     <a:lnT w="9525" cap="flat" cmpd="sng" algn="ctr">
                       <a:solidFill>
-                        <a:srgbClr val="EFD9D1"/>
+                        <a:srgbClr val="F6DED5"/>
                       </a:solidFill>
                       <a:prstDash val="solid"/>
                     </a:lnT>
                     <a:lnB w="9525" cap="flat" cmpd="sng" algn="ctr">
                       <a:solidFill>
-                        <a:srgbClr val="EFD9D1"/>
+                        <a:srgbClr val="F6DED5"/>
                       </a:solidFill>
                       <a:prstDash val="solid"/>
                     </a:lnB>
@@ -6289,7 +6564,7 @@
                       <a:r>
                         <a:rPr sz="1400" b="1">
                           <a:solidFill>
-                            <a:srgbClr val="3B2017"/>
+                            <a:srgbClr val="493027"/>
                           </a:solidFill>
                         </a:rPr>
                         <a:t>질병 진단</a:t>
@@ -6299,30 +6574,30 @@
                   <a:tcPr anchor="ctr" marL="73152" marR="73152">
                     <a:lnL w="9525" cap="flat" cmpd="sng" algn="ctr">
                       <a:solidFill>
-                        <a:srgbClr val="EFD9D1"/>
+                        <a:srgbClr val="F6DED5"/>
                       </a:solidFill>
                       <a:prstDash val="solid"/>
                     </a:lnL>
                     <a:lnR w="9525" cap="flat" cmpd="sng" algn="ctr">
                       <a:solidFill>
-                        <a:srgbClr val="EFD9D1"/>
+                        <a:srgbClr val="F6DED5"/>
                       </a:solidFill>
                       <a:prstDash val="solid"/>
                     </a:lnR>
                     <a:lnT w="9525" cap="flat" cmpd="sng" algn="ctr">
                       <a:solidFill>
-                        <a:srgbClr val="EFD9D1"/>
+                        <a:srgbClr val="F6DED5"/>
                       </a:solidFill>
                       <a:prstDash val="solid"/>
                     </a:lnT>
                     <a:lnB w="9525" cap="flat" cmpd="sng" algn="ctr">
                       <a:solidFill>
-                        <a:srgbClr val="EFD9D1"/>
+                        <a:srgbClr val="F6DED5"/>
                       </a:solidFill>
                       <a:prstDash val="solid"/>
                     </a:lnB>
                     <a:solidFill>
-                      <a:srgbClr val="EFD9D1"/>
+                      <a:srgbClr val="F6DED5"/>
                     </a:solidFill>
                   </a:tcPr>
                 </a:tc>
@@ -6335,7 +6610,7 @@
                       <a:r>
                         <a:rPr sz="1400" b="0">
                           <a:solidFill>
-                            <a:srgbClr val="2B2B2B"/>
+                            <a:srgbClr val="26231F"/>
                           </a:solidFill>
                         </a:rPr>
                         <a:t>□</a:t>
@@ -6345,30 +6620,30 @@
                   <a:tcPr anchor="ctr" marL="73152" marR="73152">
                     <a:lnL w="9525" cap="flat" cmpd="sng" algn="ctr">
                       <a:solidFill>
-                        <a:srgbClr val="EFD9D1"/>
+                        <a:srgbClr val="F6DED5"/>
                       </a:solidFill>
                       <a:prstDash val="solid"/>
                     </a:lnL>
                     <a:lnR w="9525" cap="flat" cmpd="sng" algn="ctr">
                       <a:solidFill>
-                        <a:srgbClr val="EFD9D1"/>
+                        <a:srgbClr val="F6DED5"/>
                       </a:solidFill>
                       <a:prstDash val="solid"/>
                     </a:lnR>
                     <a:lnT w="9525" cap="flat" cmpd="sng" algn="ctr">
                       <a:solidFill>
-                        <a:srgbClr val="EFD9D1"/>
+                        <a:srgbClr val="F6DED5"/>
                       </a:solidFill>
                       <a:prstDash val="solid"/>
                     </a:lnT>
                     <a:lnB w="9525" cap="flat" cmpd="sng" algn="ctr">
                       <a:solidFill>
-                        <a:srgbClr val="EFD9D1"/>
+                        <a:srgbClr val="F6DED5"/>
                       </a:solidFill>
                       <a:prstDash val="solid"/>
                     </a:lnB>
                     <a:solidFill>
-                      <a:srgbClr val="F9F3F0"/>
+                      <a:srgbClr val="FBF0EC"/>
                     </a:solidFill>
                   </a:tcPr>
                 </a:tc>
@@ -6381,7 +6656,7 @@
                       <a:r>
                         <a:rPr sz="1400" b="0">
                           <a:solidFill>
-                            <a:srgbClr val="2B2B2B"/>
+                            <a:srgbClr val="26231F"/>
                           </a:solidFill>
                         </a:rPr>
                         <a:t>□</a:t>
@@ -6391,30 +6666,30 @@
                   <a:tcPr anchor="ctr" marL="73152" marR="73152">
                     <a:lnL w="9525" cap="flat" cmpd="sng" algn="ctr">
                       <a:solidFill>
-                        <a:srgbClr val="EFD9D1"/>
+                        <a:srgbClr val="F6DED5"/>
                       </a:solidFill>
                       <a:prstDash val="solid"/>
                     </a:lnL>
                     <a:lnR w="9525" cap="flat" cmpd="sng" algn="ctr">
                       <a:solidFill>
-                        <a:srgbClr val="EFD9D1"/>
+                        <a:srgbClr val="F6DED5"/>
                       </a:solidFill>
                       <a:prstDash val="solid"/>
                     </a:lnR>
                     <a:lnT w="9525" cap="flat" cmpd="sng" algn="ctr">
                       <a:solidFill>
-                        <a:srgbClr val="EFD9D1"/>
+                        <a:srgbClr val="F6DED5"/>
                       </a:solidFill>
                       <a:prstDash val="solid"/>
                     </a:lnT>
                     <a:lnB w="9525" cap="flat" cmpd="sng" algn="ctr">
                       <a:solidFill>
-                        <a:srgbClr val="EFD9D1"/>
+                        <a:srgbClr val="F6DED5"/>
                       </a:solidFill>
                       <a:prstDash val="solid"/>
                     </a:lnB>
                     <a:solidFill>
-                      <a:srgbClr val="F9F3F0"/>
+                      <a:srgbClr val="FBF0EC"/>
                     </a:solidFill>
                   </a:tcPr>
                 </a:tc>
@@ -6427,7 +6702,7 @@
                       <a:r>
                         <a:rPr sz="1400" b="0">
                           <a:solidFill>
-                            <a:srgbClr val="2B2B2B"/>
+                            <a:srgbClr val="26231F"/>
                           </a:solidFill>
                         </a:rPr>
                         <a:t>□</a:t>
@@ -6437,30 +6712,30 @@
                   <a:tcPr anchor="ctr" marL="73152" marR="73152">
                     <a:lnL w="9525" cap="flat" cmpd="sng" algn="ctr">
                       <a:solidFill>
-                        <a:srgbClr val="EFD9D1"/>
+                        <a:srgbClr val="F6DED5"/>
                       </a:solidFill>
                       <a:prstDash val="solid"/>
                     </a:lnL>
                     <a:lnR w="9525" cap="flat" cmpd="sng" algn="ctr">
                       <a:solidFill>
-                        <a:srgbClr val="EFD9D1"/>
+                        <a:srgbClr val="F6DED5"/>
                       </a:solidFill>
                       <a:prstDash val="solid"/>
                     </a:lnR>
                     <a:lnT w="9525" cap="flat" cmpd="sng" algn="ctr">
                       <a:solidFill>
-                        <a:srgbClr val="EFD9D1"/>
+                        <a:srgbClr val="F6DED5"/>
                       </a:solidFill>
                       <a:prstDash val="solid"/>
                     </a:lnT>
                     <a:lnB w="9525" cap="flat" cmpd="sng" algn="ctr">
                       <a:solidFill>
-                        <a:srgbClr val="EFD9D1"/>
+                        <a:srgbClr val="F6DED5"/>
                       </a:solidFill>
                       <a:prstDash val="solid"/>
                     </a:lnB>
                     <a:solidFill>
-                      <a:srgbClr val="F9F3F0"/>
+                      <a:srgbClr val="FBF0EC"/>
                     </a:solidFill>
                   </a:tcPr>
                 </a:tc>
@@ -6475,7 +6750,7 @@
                       <a:r>
                         <a:rPr sz="1400" b="1">
                           <a:solidFill>
-                            <a:srgbClr val="3B2017"/>
+                            <a:srgbClr val="493027"/>
                           </a:solidFill>
                         </a:rPr>
                         <a:t>암</a:t>
@@ -6485,30 +6760,30 @@
                   <a:tcPr anchor="ctr" marL="73152" marR="73152">
                     <a:lnL w="9525" cap="flat" cmpd="sng" algn="ctr">
                       <a:solidFill>
-                        <a:srgbClr val="EFD9D1"/>
+                        <a:srgbClr val="F6DED5"/>
                       </a:solidFill>
                       <a:prstDash val="solid"/>
                     </a:lnL>
                     <a:lnR w="9525" cap="flat" cmpd="sng" algn="ctr">
                       <a:solidFill>
-                        <a:srgbClr val="EFD9D1"/>
+                        <a:srgbClr val="F6DED5"/>
                       </a:solidFill>
                       <a:prstDash val="solid"/>
                     </a:lnR>
                     <a:lnT w="9525" cap="flat" cmpd="sng" algn="ctr">
                       <a:solidFill>
-                        <a:srgbClr val="EFD9D1"/>
+                        <a:srgbClr val="F6DED5"/>
                       </a:solidFill>
                       <a:prstDash val="solid"/>
                     </a:lnT>
                     <a:lnB w="9525" cap="flat" cmpd="sng" algn="ctr">
                       <a:solidFill>
-                        <a:srgbClr val="EFD9D1"/>
+                        <a:srgbClr val="F6DED5"/>
                       </a:solidFill>
                       <a:prstDash val="solid"/>
                     </a:lnB>
                     <a:solidFill>
-                      <a:srgbClr val="EFD9D1"/>
+                      <a:srgbClr val="F6DED5"/>
                     </a:solidFill>
                   </a:tcPr>
                 </a:tc>
@@ -6521,7 +6796,7 @@
                       <a:r>
                         <a:rPr sz="1400" b="0">
                           <a:solidFill>
-                            <a:srgbClr val="2B2B2B"/>
+                            <a:srgbClr val="26231F"/>
                           </a:solidFill>
                         </a:rPr>
                         <a:t>□</a:t>
@@ -6531,25 +6806,25 @@
                   <a:tcPr anchor="ctr" marL="73152" marR="73152">
                     <a:lnL w="9525" cap="flat" cmpd="sng" algn="ctr">
                       <a:solidFill>
-                        <a:srgbClr val="EFD9D1"/>
+                        <a:srgbClr val="F6DED5"/>
                       </a:solidFill>
                       <a:prstDash val="solid"/>
                     </a:lnL>
                     <a:lnR w="9525" cap="flat" cmpd="sng" algn="ctr">
                       <a:solidFill>
-                        <a:srgbClr val="EFD9D1"/>
+                        <a:srgbClr val="F6DED5"/>
                       </a:solidFill>
                       <a:prstDash val="solid"/>
                     </a:lnR>
                     <a:lnT w="9525" cap="flat" cmpd="sng" algn="ctr">
                       <a:solidFill>
-                        <a:srgbClr val="EFD9D1"/>
+                        <a:srgbClr val="F6DED5"/>
                       </a:solidFill>
                       <a:prstDash val="solid"/>
                     </a:lnT>
                     <a:lnB w="9525" cap="flat" cmpd="sng" algn="ctr">
                       <a:solidFill>
-                        <a:srgbClr val="EFD9D1"/>
+                        <a:srgbClr val="F6DED5"/>
                       </a:solidFill>
                       <a:prstDash val="solid"/>
                     </a:lnB>
@@ -6567,7 +6842,7 @@
                       <a:r>
                         <a:rPr sz="1400" b="0">
                           <a:solidFill>
-                            <a:srgbClr val="2B2B2B"/>
+                            <a:srgbClr val="26231F"/>
                           </a:solidFill>
                         </a:rPr>
                         <a:t>□</a:t>
@@ -6577,25 +6852,25 @@
                   <a:tcPr anchor="ctr" marL="73152" marR="73152">
                     <a:lnL w="9525" cap="flat" cmpd="sng" algn="ctr">
                       <a:solidFill>
-                        <a:srgbClr val="EFD9D1"/>
+                        <a:srgbClr val="F6DED5"/>
                       </a:solidFill>
                       <a:prstDash val="solid"/>
                     </a:lnL>
                     <a:lnR w="9525" cap="flat" cmpd="sng" algn="ctr">
                       <a:solidFill>
-                        <a:srgbClr val="EFD9D1"/>
+                        <a:srgbClr val="F6DED5"/>
                       </a:solidFill>
                       <a:prstDash val="solid"/>
                     </a:lnR>
                     <a:lnT w="9525" cap="flat" cmpd="sng" algn="ctr">
                       <a:solidFill>
-                        <a:srgbClr val="EFD9D1"/>
+                        <a:srgbClr val="F6DED5"/>
                       </a:solidFill>
                       <a:prstDash val="solid"/>
                     </a:lnT>
                     <a:lnB w="9525" cap="flat" cmpd="sng" algn="ctr">
                       <a:solidFill>
-                        <a:srgbClr val="EFD9D1"/>
+                        <a:srgbClr val="F6DED5"/>
                       </a:solidFill>
                       <a:prstDash val="solid"/>
                     </a:lnB>
@@ -6613,7 +6888,7 @@
                       <a:r>
                         <a:rPr sz="1400" b="0">
                           <a:solidFill>
-                            <a:srgbClr val="2B2B2B"/>
+                            <a:srgbClr val="26231F"/>
                           </a:solidFill>
                         </a:rPr>
                         <a:t>□</a:t>
@@ -6623,25 +6898,25 @@
                   <a:tcPr anchor="ctr" marL="73152" marR="73152">
                     <a:lnL w="9525" cap="flat" cmpd="sng" algn="ctr">
                       <a:solidFill>
-                        <a:srgbClr val="EFD9D1"/>
+                        <a:srgbClr val="F6DED5"/>
                       </a:solidFill>
                       <a:prstDash val="solid"/>
                     </a:lnL>
                     <a:lnR w="9525" cap="flat" cmpd="sng" algn="ctr">
                       <a:solidFill>
-                        <a:srgbClr val="EFD9D1"/>
+                        <a:srgbClr val="F6DED5"/>
                       </a:solidFill>
                       <a:prstDash val="solid"/>
                     </a:lnR>
                     <a:lnT w="9525" cap="flat" cmpd="sng" algn="ctr">
                       <a:solidFill>
-                        <a:srgbClr val="EFD9D1"/>
+                        <a:srgbClr val="F6DED5"/>
                       </a:solidFill>
                       <a:prstDash val="solid"/>
                     </a:lnT>
                     <a:lnB w="9525" cap="flat" cmpd="sng" algn="ctr">
                       <a:solidFill>
-                        <a:srgbClr val="EFD9D1"/>
+                        <a:srgbClr val="F6DED5"/>
                       </a:solidFill>
                       <a:prstDash val="solid"/>
                     </a:lnB>
@@ -6661,7 +6936,7 @@
                       <a:r>
                         <a:rPr sz="1400" b="1">
                           <a:solidFill>
-                            <a:srgbClr val="3B2017"/>
+                            <a:srgbClr val="493027"/>
                           </a:solidFill>
                         </a:rPr>
                         <a:t>뇌·심장</a:t>
@@ -6671,30 +6946,30 @@
                   <a:tcPr anchor="ctr" marL="73152" marR="73152">
                     <a:lnL w="9525" cap="flat" cmpd="sng" algn="ctr">
                       <a:solidFill>
-                        <a:srgbClr val="EFD9D1"/>
+                        <a:srgbClr val="F6DED5"/>
                       </a:solidFill>
                       <a:prstDash val="solid"/>
                     </a:lnL>
                     <a:lnR w="9525" cap="flat" cmpd="sng" algn="ctr">
                       <a:solidFill>
-                        <a:srgbClr val="EFD9D1"/>
+                        <a:srgbClr val="F6DED5"/>
                       </a:solidFill>
                       <a:prstDash val="solid"/>
                     </a:lnR>
                     <a:lnT w="9525" cap="flat" cmpd="sng" algn="ctr">
                       <a:solidFill>
-                        <a:srgbClr val="EFD9D1"/>
+                        <a:srgbClr val="F6DED5"/>
                       </a:solidFill>
                       <a:prstDash val="solid"/>
                     </a:lnT>
                     <a:lnB w="9525" cap="flat" cmpd="sng" algn="ctr">
                       <a:solidFill>
-                        <a:srgbClr val="EFD9D1"/>
+                        <a:srgbClr val="F6DED5"/>
                       </a:solidFill>
                       <a:prstDash val="solid"/>
                     </a:lnB>
                     <a:solidFill>
-                      <a:srgbClr val="EFD9D1"/>
+                      <a:srgbClr val="F6DED5"/>
                     </a:solidFill>
                   </a:tcPr>
                 </a:tc>
@@ -6707,7 +6982,7 @@
                       <a:r>
                         <a:rPr sz="1400" b="0">
                           <a:solidFill>
-                            <a:srgbClr val="2B2B2B"/>
+                            <a:srgbClr val="26231F"/>
                           </a:solidFill>
                         </a:rPr>
                         <a:t>□</a:t>
@@ -6717,30 +6992,30 @@
                   <a:tcPr anchor="ctr" marL="73152" marR="73152">
                     <a:lnL w="9525" cap="flat" cmpd="sng" algn="ctr">
                       <a:solidFill>
-                        <a:srgbClr val="EFD9D1"/>
+                        <a:srgbClr val="F6DED5"/>
                       </a:solidFill>
                       <a:prstDash val="solid"/>
                     </a:lnL>
                     <a:lnR w="9525" cap="flat" cmpd="sng" algn="ctr">
                       <a:solidFill>
-                        <a:srgbClr val="EFD9D1"/>
+                        <a:srgbClr val="F6DED5"/>
                       </a:solidFill>
                       <a:prstDash val="solid"/>
                     </a:lnR>
                     <a:lnT w="9525" cap="flat" cmpd="sng" algn="ctr">
                       <a:solidFill>
-                        <a:srgbClr val="EFD9D1"/>
+                        <a:srgbClr val="F6DED5"/>
                       </a:solidFill>
                       <a:prstDash val="solid"/>
                     </a:lnT>
                     <a:lnB w="9525" cap="flat" cmpd="sng" algn="ctr">
                       <a:solidFill>
-                        <a:srgbClr val="EFD9D1"/>
+                        <a:srgbClr val="F6DED5"/>
                       </a:solidFill>
                       <a:prstDash val="solid"/>
                     </a:lnB>
                     <a:solidFill>
-                      <a:srgbClr val="F9F3F0"/>
+                      <a:srgbClr val="FBF0EC"/>
                     </a:solidFill>
                   </a:tcPr>
                 </a:tc>
@@ -6753,7 +7028,7 @@
                       <a:r>
                         <a:rPr sz="1400" b="0">
                           <a:solidFill>
-                            <a:srgbClr val="2B2B2B"/>
+                            <a:srgbClr val="26231F"/>
                           </a:solidFill>
                         </a:rPr>
                         <a:t>□</a:t>
@@ -6763,30 +7038,30 @@
                   <a:tcPr anchor="ctr" marL="73152" marR="73152">
                     <a:lnL w="9525" cap="flat" cmpd="sng" algn="ctr">
                       <a:solidFill>
-                        <a:srgbClr val="EFD9D1"/>
+                        <a:srgbClr val="F6DED5"/>
                       </a:solidFill>
                       <a:prstDash val="solid"/>
                     </a:lnL>
                     <a:lnR w="9525" cap="flat" cmpd="sng" algn="ctr">
                       <a:solidFill>
-                        <a:srgbClr val="EFD9D1"/>
+                        <a:srgbClr val="F6DED5"/>
                       </a:solidFill>
                       <a:prstDash val="solid"/>
                     </a:lnR>
                     <a:lnT w="9525" cap="flat" cmpd="sng" algn="ctr">
                       <a:solidFill>
-                        <a:srgbClr val="EFD9D1"/>
+                        <a:srgbClr val="F6DED5"/>
                       </a:solidFill>
                       <a:prstDash val="solid"/>
                     </a:lnT>
                     <a:lnB w="9525" cap="flat" cmpd="sng" algn="ctr">
                       <a:solidFill>
-                        <a:srgbClr val="EFD9D1"/>
+                        <a:srgbClr val="F6DED5"/>
                       </a:solidFill>
                       <a:prstDash val="solid"/>
                     </a:lnB>
                     <a:solidFill>
-                      <a:srgbClr val="F9F3F0"/>
+                      <a:srgbClr val="FBF0EC"/>
                     </a:solidFill>
                   </a:tcPr>
                 </a:tc>
@@ -6799,7 +7074,7 @@
                       <a:r>
                         <a:rPr sz="1400" b="0">
                           <a:solidFill>
-                            <a:srgbClr val="2B2B2B"/>
+                            <a:srgbClr val="26231F"/>
                           </a:solidFill>
                         </a:rPr>
                         <a:t>□</a:t>
@@ -6809,30 +7084,30 @@
                   <a:tcPr anchor="ctr" marL="73152" marR="73152">
                     <a:lnL w="9525" cap="flat" cmpd="sng" algn="ctr">
                       <a:solidFill>
-                        <a:srgbClr val="EFD9D1"/>
+                        <a:srgbClr val="F6DED5"/>
                       </a:solidFill>
                       <a:prstDash val="solid"/>
                     </a:lnL>
                     <a:lnR w="9525" cap="flat" cmpd="sng" algn="ctr">
                       <a:solidFill>
-                        <a:srgbClr val="EFD9D1"/>
+                        <a:srgbClr val="F6DED5"/>
                       </a:solidFill>
                       <a:prstDash val="solid"/>
                     </a:lnR>
                     <a:lnT w="9525" cap="flat" cmpd="sng" algn="ctr">
                       <a:solidFill>
-                        <a:srgbClr val="EFD9D1"/>
+                        <a:srgbClr val="F6DED5"/>
                       </a:solidFill>
                       <a:prstDash val="solid"/>
                     </a:lnT>
                     <a:lnB w="9525" cap="flat" cmpd="sng" algn="ctr">
                       <a:solidFill>
-                        <a:srgbClr val="EFD9D1"/>
+                        <a:srgbClr val="F6DED5"/>
                       </a:solidFill>
                       <a:prstDash val="solid"/>
                     </a:lnB>
                     <a:solidFill>
-                      <a:srgbClr val="F9F3F0"/>
+                      <a:srgbClr val="FBF0EC"/>
                     </a:solidFill>
                   </a:tcPr>
                 </a:tc>
@@ -6847,7 +7122,7 @@
                       <a:r>
                         <a:rPr sz="1400" b="1">
                           <a:solidFill>
-                            <a:srgbClr val="3B2017"/>
+                            <a:srgbClr val="493027"/>
                           </a:solidFill>
                         </a:rPr>
                         <a:t>입원·수술</a:t>
@@ -6857,30 +7132,30 @@
                   <a:tcPr anchor="ctr" marL="73152" marR="73152">
                     <a:lnL w="9525" cap="flat" cmpd="sng" algn="ctr">
                       <a:solidFill>
-                        <a:srgbClr val="EFD9D1"/>
+                        <a:srgbClr val="F6DED5"/>
                       </a:solidFill>
                       <a:prstDash val="solid"/>
                     </a:lnL>
                     <a:lnR w="9525" cap="flat" cmpd="sng" algn="ctr">
                       <a:solidFill>
-                        <a:srgbClr val="EFD9D1"/>
+                        <a:srgbClr val="F6DED5"/>
                       </a:solidFill>
                       <a:prstDash val="solid"/>
                     </a:lnR>
                     <a:lnT w="9525" cap="flat" cmpd="sng" algn="ctr">
                       <a:solidFill>
-                        <a:srgbClr val="EFD9D1"/>
+                        <a:srgbClr val="F6DED5"/>
                       </a:solidFill>
                       <a:prstDash val="solid"/>
                     </a:lnT>
                     <a:lnB w="9525" cap="flat" cmpd="sng" algn="ctr">
                       <a:solidFill>
-                        <a:srgbClr val="EFD9D1"/>
+                        <a:srgbClr val="F6DED5"/>
                       </a:solidFill>
                       <a:prstDash val="solid"/>
                     </a:lnB>
                     <a:solidFill>
-                      <a:srgbClr val="EFD9D1"/>
+                      <a:srgbClr val="F6DED5"/>
                     </a:solidFill>
                   </a:tcPr>
                 </a:tc>
@@ -6893,7 +7168,7 @@
                       <a:r>
                         <a:rPr sz="1400" b="0">
                           <a:solidFill>
-                            <a:srgbClr val="2B2B2B"/>
+                            <a:srgbClr val="26231F"/>
                           </a:solidFill>
                         </a:rPr>
                         <a:t>□</a:t>
@@ -6903,25 +7178,25 @@
                   <a:tcPr anchor="ctr" marL="73152" marR="73152">
                     <a:lnL w="9525" cap="flat" cmpd="sng" algn="ctr">
                       <a:solidFill>
-                        <a:srgbClr val="EFD9D1"/>
+                        <a:srgbClr val="F6DED5"/>
                       </a:solidFill>
                       <a:prstDash val="solid"/>
                     </a:lnL>
                     <a:lnR w="9525" cap="flat" cmpd="sng" algn="ctr">
                       <a:solidFill>
-                        <a:srgbClr val="EFD9D1"/>
+                        <a:srgbClr val="F6DED5"/>
                       </a:solidFill>
                       <a:prstDash val="solid"/>
                     </a:lnR>
                     <a:lnT w="9525" cap="flat" cmpd="sng" algn="ctr">
                       <a:solidFill>
-                        <a:srgbClr val="EFD9D1"/>
+                        <a:srgbClr val="F6DED5"/>
                       </a:solidFill>
                       <a:prstDash val="solid"/>
                     </a:lnT>
                     <a:lnB w="9525" cap="flat" cmpd="sng" algn="ctr">
                       <a:solidFill>
-                        <a:srgbClr val="EFD9D1"/>
+                        <a:srgbClr val="F6DED5"/>
                       </a:solidFill>
                       <a:prstDash val="solid"/>
                     </a:lnB>
@@ -6939,7 +7214,7 @@
                       <a:r>
                         <a:rPr sz="1400" b="0">
                           <a:solidFill>
-                            <a:srgbClr val="2B2B2B"/>
+                            <a:srgbClr val="26231F"/>
                           </a:solidFill>
                         </a:rPr>
                         <a:t>□</a:t>
@@ -6949,25 +7224,25 @@
                   <a:tcPr anchor="ctr" marL="73152" marR="73152">
                     <a:lnL w="9525" cap="flat" cmpd="sng" algn="ctr">
                       <a:solidFill>
-                        <a:srgbClr val="EFD9D1"/>
+                        <a:srgbClr val="F6DED5"/>
                       </a:solidFill>
                       <a:prstDash val="solid"/>
                     </a:lnL>
                     <a:lnR w="9525" cap="flat" cmpd="sng" algn="ctr">
                       <a:solidFill>
-                        <a:srgbClr val="EFD9D1"/>
+                        <a:srgbClr val="F6DED5"/>
                       </a:solidFill>
                       <a:prstDash val="solid"/>
                     </a:lnR>
                     <a:lnT w="9525" cap="flat" cmpd="sng" algn="ctr">
                       <a:solidFill>
-                        <a:srgbClr val="EFD9D1"/>
+                        <a:srgbClr val="F6DED5"/>
                       </a:solidFill>
                       <a:prstDash val="solid"/>
                     </a:lnT>
                     <a:lnB w="9525" cap="flat" cmpd="sng" algn="ctr">
                       <a:solidFill>
-                        <a:srgbClr val="EFD9D1"/>
+                        <a:srgbClr val="F6DED5"/>
                       </a:solidFill>
                       <a:prstDash val="solid"/>
                     </a:lnB>
@@ -6985,7 +7260,7 @@
                       <a:r>
                         <a:rPr sz="1400" b="0">
                           <a:solidFill>
-                            <a:srgbClr val="2B2B2B"/>
+                            <a:srgbClr val="26231F"/>
                           </a:solidFill>
                         </a:rPr>
                         <a:t>□</a:t>
@@ -6995,25 +7270,25 @@
                   <a:tcPr anchor="ctr" marL="73152" marR="73152">
                     <a:lnL w="9525" cap="flat" cmpd="sng" algn="ctr">
                       <a:solidFill>
-                        <a:srgbClr val="EFD9D1"/>
+                        <a:srgbClr val="F6DED5"/>
                       </a:solidFill>
                       <a:prstDash val="solid"/>
                     </a:lnL>
                     <a:lnR w="9525" cap="flat" cmpd="sng" algn="ctr">
                       <a:solidFill>
-                        <a:srgbClr val="EFD9D1"/>
+                        <a:srgbClr val="F6DED5"/>
                       </a:solidFill>
                       <a:prstDash val="solid"/>
                     </a:lnR>
                     <a:lnT w="9525" cap="flat" cmpd="sng" algn="ctr">
                       <a:solidFill>
-                        <a:srgbClr val="EFD9D1"/>
+                        <a:srgbClr val="F6DED5"/>
                       </a:solidFill>
                       <a:prstDash val="solid"/>
                     </a:lnT>
                     <a:lnB w="9525" cap="flat" cmpd="sng" algn="ctr">
                       <a:solidFill>
-                        <a:srgbClr val="EFD9D1"/>
+                        <a:srgbClr val="F6DED5"/>
                       </a:solidFill>
                       <a:prstDash val="solid"/>
                     </a:lnB>
@@ -7033,7 +7308,7 @@
                       <a:r>
                         <a:rPr sz="1400" b="1">
                           <a:solidFill>
-                            <a:srgbClr val="3B2017"/>
+                            <a:srgbClr val="493027"/>
                           </a:solidFill>
                         </a:rPr>
                         <a:t>상해</a:t>
@@ -7043,30 +7318,30 @@
                   <a:tcPr anchor="ctr" marL="73152" marR="73152">
                     <a:lnL w="9525" cap="flat" cmpd="sng" algn="ctr">
                       <a:solidFill>
-                        <a:srgbClr val="EFD9D1"/>
+                        <a:srgbClr val="F6DED5"/>
                       </a:solidFill>
                       <a:prstDash val="solid"/>
                     </a:lnL>
                     <a:lnR w="9525" cap="flat" cmpd="sng" algn="ctr">
                       <a:solidFill>
-                        <a:srgbClr val="EFD9D1"/>
+                        <a:srgbClr val="F6DED5"/>
                       </a:solidFill>
                       <a:prstDash val="solid"/>
                     </a:lnR>
                     <a:lnT w="9525" cap="flat" cmpd="sng" algn="ctr">
                       <a:solidFill>
-                        <a:srgbClr val="EFD9D1"/>
+                        <a:srgbClr val="F6DED5"/>
                       </a:solidFill>
                       <a:prstDash val="solid"/>
                     </a:lnT>
                     <a:lnB w="9525" cap="flat" cmpd="sng" algn="ctr">
                       <a:solidFill>
-                        <a:srgbClr val="EFD9D1"/>
+                        <a:srgbClr val="F6DED5"/>
                       </a:solidFill>
                       <a:prstDash val="solid"/>
                     </a:lnB>
                     <a:solidFill>
-                      <a:srgbClr val="EFD9D1"/>
+                      <a:srgbClr val="F6DED5"/>
                     </a:solidFill>
                   </a:tcPr>
                 </a:tc>
@@ -7079,7 +7354,7 @@
                       <a:r>
                         <a:rPr sz="1400" b="0">
                           <a:solidFill>
-                            <a:srgbClr val="2B2B2B"/>
+                            <a:srgbClr val="26231F"/>
                           </a:solidFill>
                         </a:rPr>
                         <a:t>□</a:t>
@@ -7089,30 +7364,30 @@
                   <a:tcPr anchor="ctr" marL="73152" marR="73152">
                     <a:lnL w="9525" cap="flat" cmpd="sng" algn="ctr">
                       <a:solidFill>
-                        <a:srgbClr val="EFD9D1"/>
+                        <a:srgbClr val="F6DED5"/>
                       </a:solidFill>
                       <a:prstDash val="solid"/>
                     </a:lnL>
                     <a:lnR w="9525" cap="flat" cmpd="sng" algn="ctr">
                       <a:solidFill>
-                        <a:srgbClr val="EFD9D1"/>
+                        <a:srgbClr val="F6DED5"/>
                       </a:solidFill>
                       <a:prstDash val="solid"/>
                     </a:lnR>
                     <a:lnT w="9525" cap="flat" cmpd="sng" algn="ctr">
                       <a:solidFill>
-                        <a:srgbClr val="EFD9D1"/>
+                        <a:srgbClr val="F6DED5"/>
                       </a:solidFill>
                       <a:prstDash val="solid"/>
                     </a:lnT>
                     <a:lnB w="9525" cap="flat" cmpd="sng" algn="ctr">
                       <a:solidFill>
-                        <a:srgbClr val="EFD9D1"/>
+                        <a:srgbClr val="F6DED5"/>
                       </a:solidFill>
                       <a:prstDash val="solid"/>
                     </a:lnB>
                     <a:solidFill>
-                      <a:srgbClr val="F9F3F0"/>
+                      <a:srgbClr val="FBF0EC"/>
                     </a:solidFill>
                   </a:tcPr>
                 </a:tc>
@@ -7125,7 +7400,7 @@
                       <a:r>
                         <a:rPr sz="1400" b="0">
                           <a:solidFill>
-                            <a:srgbClr val="2B2B2B"/>
+                            <a:srgbClr val="26231F"/>
                           </a:solidFill>
                         </a:rPr>
                         <a:t>□</a:t>
@@ -7135,30 +7410,30 @@
                   <a:tcPr anchor="ctr" marL="73152" marR="73152">
                     <a:lnL w="9525" cap="flat" cmpd="sng" algn="ctr">
                       <a:solidFill>
-                        <a:srgbClr val="EFD9D1"/>
+                        <a:srgbClr val="F6DED5"/>
                       </a:solidFill>
                       <a:prstDash val="solid"/>
                     </a:lnL>
                     <a:lnR w="9525" cap="flat" cmpd="sng" algn="ctr">
                       <a:solidFill>
-                        <a:srgbClr val="EFD9D1"/>
+                        <a:srgbClr val="F6DED5"/>
                       </a:solidFill>
                       <a:prstDash val="solid"/>
                     </a:lnR>
                     <a:lnT w="9525" cap="flat" cmpd="sng" algn="ctr">
                       <a:solidFill>
-                        <a:srgbClr val="EFD9D1"/>
+                        <a:srgbClr val="F6DED5"/>
                       </a:solidFill>
                       <a:prstDash val="solid"/>
                     </a:lnT>
                     <a:lnB w="9525" cap="flat" cmpd="sng" algn="ctr">
                       <a:solidFill>
-                        <a:srgbClr val="EFD9D1"/>
+                        <a:srgbClr val="F6DED5"/>
                       </a:solidFill>
                       <a:prstDash val="solid"/>
                     </a:lnB>
                     <a:solidFill>
-                      <a:srgbClr val="F9F3F0"/>
+                      <a:srgbClr val="FBF0EC"/>
                     </a:solidFill>
                   </a:tcPr>
                 </a:tc>
@@ -7171,7 +7446,7 @@
                       <a:r>
                         <a:rPr sz="1400" b="0">
                           <a:solidFill>
-                            <a:srgbClr val="2B2B2B"/>
+                            <a:srgbClr val="26231F"/>
                           </a:solidFill>
                         </a:rPr>
                         <a:t>□</a:t>
@@ -7181,30 +7456,30 @@
                   <a:tcPr anchor="ctr" marL="73152" marR="73152">
                     <a:lnL w="9525" cap="flat" cmpd="sng" algn="ctr">
                       <a:solidFill>
-                        <a:srgbClr val="EFD9D1"/>
+                        <a:srgbClr val="F6DED5"/>
                       </a:solidFill>
                       <a:prstDash val="solid"/>
                     </a:lnL>
                     <a:lnR w="9525" cap="flat" cmpd="sng" algn="ctr">
                       <a:solidFill>
-                        <a:srgbClr val="EFD9D1"/>
+                        <a:srgbClr val="F6DED5"/>
                       </a:solidFill>
                       <a:prstDash val="solid"/>
                     </a:lnR>
                     <a:lnT w="9525" cap="flat" cmpd="sng" algn="ctr">
                       <a:solidFill>
-                        <a:srgbClr val="EFD9D1"/>
+                        <a:srgbClr val="F6DED5"/>
                       </a:solidFill>
                       <a:prstDash val="solid"/>
                     </a:lnT>
                     <a:lnB w="9525" cap="flat" cmpd="sng" algn="ctr">
                       <a:solidFill>
-                        <a:srgbClr val="EFD9D1"/>
+                        <a:srgbClr val="F6DED5"/>
                       </a:solidFill>
                       <a:prstDash val="solid"/>
                     </a:lnB>
                     <a:solidFill>
-                      <a:srgbClr val="F9F3F0"/>
+                      <a:srgbClr val="FBF0EC"/>
                     </a:solidFill>
                   </a:tcPr>
                 </a:tc>
@@ -7219,7 +7494,7 @@
                       <a:r>
                         <a:rPr sz="1400" b="1">
                           <a:solidFill>
-                            <a:srgbClr val="3B2017"/>
+                            <a:srgbClr val="493027"/>
                           </a:solidFill>
                         </a:rPr>
                         <a:t>실손의료</a:t>
@@ -7229,30 +7504,30 @@
                   <a:tcPr anchor="ctr" marL="73152" marR="73152">
                     <a:lnL w="9525" cap="flat" cmpd="sng" algn="ctr">
                       <a:solidFill>
-                        <a:srgbClr val="EFD9D1"/>
+                        <a:srgbClr val="F6DED5"/>
                       </a:solidFill>
                       <a:prstDash val="solid"/>
                     </a:lnL>
                     <a:lnR w="9525" cap="flat" cmpd="sng" algn="ctr">
                       <a:solidFill>
-                        <a:srgbClr val="EFD9D1"/>
+                        <a:srgbClr val="F6DED5"/>
                       </a:solidFill>
                       <a:prstDash val="solid"/>
                     </a:lnR>
                     <a:lnT w="9525" cap="flat" cmpd="sng" algn="ctr">
                       <a:solidFill>
-                        <a:srgbClr val="EFD9D1"/>
+                        <a:srgbClr val="F6DED5"/>
                       </a:solidFill>
                       <a:prstDash val="solid"/>
                     </a:lnT>
                     <a:lnB w="9525" cap="flat" cmpd="sng" algn="ctr">
                       <a:solidFill>
-                        <a:srgbClr val="EFD9D1"/>
+                        <a:srgbClr val="F6DED5"/>
                       </a:solidFill>
                       <a:prstDash val="solid"/>
                     </a:lnB>
                     <a:solidFill>
-                      <a:srgbClr val="EFD9D1"/>
+                      <a:srgbClr val="F6DED5"/>
                     </a:solidFill>
                   </a:tcPr>
                 </a:tc>
@@ -7265,7 +7540,7 @@
                       <a:r>
                         <a:rPr sz="1400" b="0">
                           <a:solidFill>
-                            <a:srgbClr val="2B2B2B"/>
+                            <a:srgbClr val="26231F"/>
                           </a:solidFill>
                         </a:rPr>
                         <a:t>□</a:t>
@@ -7275,25 +7550,25 @@
                   <a:tcPr anchor="ctr" marL="73152" marR="73152">
                     <a:lnL w="9525" cap="flat" cmpd="sng" algn="ctr">
                       <a:solidFill>
-                        <a:srgbClr val="EFD9D1"/>
+                        <a:srgbClr val="F6DED5"/>
                       </a:solidFill>
                       <a:prstDash val="solid"/>
                     </a:lnL>
                     <a:lnR w="9525" cap="flat" cmpd="sng" algn="ctr">
                       <a:solidFill>
-                        <a:srgbClr val="EFD9D1"/>
+                        <a:srgbClr val="F6DED5"/>
                       </a:solidFill>
                       <a:prstDash val="solid"/>
                     </a:lnR>
                     <a:lnT w="9525" cap="flat" cmpd="sng" algn="ctr">
                       <a:solidFill>
-                        <a:srgbClr val="EFD9D1"/>
+                        <a:srgbClr val="F6DED5"/>
                       </a:solidFill>
                       <a:prstDash val="solid"/>
                     </a:lnT>
                     <a:lnB w="9525" cap="flat" cmpd="sng" algn="ctr">
                       <a:solidFill>
-                        <a:srgbClr val="EFD9D1"/>
+                        <a:srgbClr val="F6DED5"/>
                       </a:solidFill>
                       <a:prstDash val="solid"/>
                     </a:lnB>
@@ -7311,7 +7586,7 @@
                       <a:r>
                         <a:rPr sz="1400" b="0">
                           <a:solidFill>
-                            <a:srgbClr val="2B2B2B"/>
+                            <a:srgbClr val="26231F"/>
                           </a:solidFill>
                         </a:rPr>
                         <a:t>□</a:t>
@@ -7321,25 +7596,25 @@
                   <a:tcPr anchor="ctr" marL="73152" marR="73152">
                     <a:lnL w="9525" cap="flat" cmpd="sng" algn="ctr">
                       <a:solidFill>
-                        <a:srgbClr val="EFD9D1"/>
+                        <a:srgbClr val="F6DED5"/>
                       </a:solidFill>
                       <a:prstDash val="solid"/>
                     </a:lnL>
                     <a:lnR w="9525" cap="flat" cmpd="sng" algn="ctr">
                       <a:solidFill>
-                        <a:srgbClr val="EFD9D1"/>
+                        <a:srgbClr val="F6DED5"/>
                       </a:solidFill>
                       <a:prstDash val="solid"/>
                     </a:lnR>
                     <a:lnT w="9525" cap="flat" cmpd="sng" algn="ctr">
                       <a:solidFill>
-                        <a:srgbClr val="EFD9D1"/>
+                        <a:srgbClr val="F6DED5"/>
                       </a:solidFill>
                       <a:prstDash val="solid"/>
                     </a:lnT>
                     <a:lnB w="9525" cap="flat" cmpd="sng" algn="ctr">
                       <a:solidFill>
-                        <a:srgbClr val="EFD9D1"/>
+                        <a:srgbClr val="F6DED5"/>
                       </a:solidFill>
                       <a:prstDash val="solid"/>
                     </a:lnB>
@@ -7357,7 +7632,7 @@
                       <a:r>
                         <a:rPr sz="1400" b="0">
                           <a:solidFill>
-                            <a:srgbClr val="2B2B2B"/>
+                            <a:srgbClr val="26231F"/>
                           </a:solidFill>
                         </a:rPr>
                         <a:t>□</a:t>
@@ -7367,25 +7642,25 @@
                   <a:tcPr anchor="ctr" marL="73152" marR="73152">
                     <a:lnL w="9525" cap="flat" cmpd="sng" algn="ctr">
                       <a:solidFill>
-                        <a:srgbClr val="EFD9D1"/>
+                        <a:srgbClr val="F6DED5"/>
                       </a:solidFill>
                       <a:prstDash val="solid"/>
                     </a:lnL>
                     <a:lnR w="9525" cap="flat" cmpd="sng" algn="ctr">
                       <a:solidFill>
-                        <a:srgbClr val="EFD9D1"/>
+                        <a:srgbClr val="F6DED5"/>
                       </a:solidFill>
                       <a:prstDash val="solid"/>
                     </a:lnR>
                     <a:lnT w="9525" cap="flat" cmpd="sng" algn="ctr">
                       <a:solidFill>
-                        <a:srgbClr val="EFD9D1"/>
+                        <a:srgbClr val="F6DED5"/>
                       </a:solidFill>
                       <a:prstDash val="solid"/>
                     </a:lnT>
                     <a:lnB w="9525" cap="flat" cmpd="sng" algn="ctr">
                       <a:solidFill>
-                        <a:srgbClr val="EFD9D1"/>
+                        <a:srgbClr val="F6DED5"/>
                       </a:solidFill>
                       <a:prstDash val="solid"/>
                     </a:lnB>
@@ -7405,7 +7680,7 @@
                       <a:r>
                         <a:rPr sz="1400" b="1">
                           <a:solidFill>
-                            <a:srgbClr val="3B2017"/>
+                            <a:srgbClr val="493027"/>
                           </a:solidFill>
                         </a:rPr>
                         <a:t>연금·노후자금</a:t>
@@ -7415,30 +7690,30 @@
                   <a:tcPr anchor="ctr" marL="73152" marR="73152">
                     <a:lnL w="9525" cap="flat" cmpd="sng" algn="ctr">
                       <a:solidFill>
-                        <a:srgbClr val="EFD9D1"/>
+                        <a:srgbClr val="F6DED5"/>
                       </a:solidFill>
                       <a:prstDash val="solid"/>
                     </a:lnL>
                     <a:lnR w="9525" cap="flat" cmpd="sng" algn="ctr">
                       <a:solidFill>
-                        <a:srgbClr val="EFD9D1"/>
+                        <a:srgbClr val="F6DED5"/>
                       </a:solidFill>
                       <a:prstDash val="solid"/>
                     </a:lnR>
                     <a:lnT w="9525" cap="flat" cmpd="sng" algn="ctr">
                       <a:solidFill>
-                        <a:srgbClr val="EFD9D1"/>
+                        <a:srgbClr val="F6DED5"/>
                       </a:solidFill>
                       <a:prstDash val="solid"/>
                     </a:lnT>
                     <a:lnB w="9525" cap="flat" cmpd="sng" algn="ctr">
                       <a:solidFill>
-                        <a:srgbClr val="EFD9D1"/>
+                        <a:srgbClr val="F6DED5"/>
                       </a:solidFill>
                       <a:prstDash val="solid"/>
                     </a:lnB>
                     <a:solidFill>
-                      <a:srgbClr val="EFD9D1"/>
+                      <a:srgbClr val="F6DED5"/>
                     </a:solidFill>
                   </a:tcPr>
                 </a:tc>
@@ -7451,7 +7726,7 @@
                       <a:r>
                         <a:rPr sz="1400" b="0">
                           <a:solidFill>
-                            <a:srgbClr val="2B2B2B"/>
+                            <a:srgbClr val="26231F"/>
                           </a:solidFill>
                         </a:rPr>
                         <a:t>□</a:t>
@@ -7461,30 +7736,30 @@
                   <a:tcPr anchor="ctr" marL="73152" marR="73152">
                     <a:lnL w="9525" cap="flat" cmpd="sng" algn="ctr">
                       <a:solidFill>
-                        <a:srgbClr val="EFD9D1"/>
+                        <a:srgbClr val="F6DED5"/>
                       </a:solidFill>
                       <a:prstDash val="solid"/>
                     </a:lnL>
                     <a:lnR w="9525" cap="flat" cmpd="sng" algn="ctr">
                       <a:solidFill>
-                        <a:srgbClr val="EFD9D1"/>
+                        <a:srgbClr val="F6DED5"/>
                       </a:solidFill>
                       <a:prstDash val="solid"/>
                     </a:lnR>
                     <a:lnT w="9525" cap="flat" cmpd="sng" algn="ctr">
                       <a:solidFill>
-                        <a:srgbClr val="EFD9D1"/>
+                        <a:srgbClr val="F6DED5"/>
                       </a:solidFill>
                       <a:prstDash val="solid"/>
                     </a:lnT>
                     <a:lnB w="9525" cap="flat" cmpd="sng" algn="ctr">
                       <a:solidFill>
-                        <a:srgbClr val="EFD9D1"/>
+                        <a:srgbClr val="F6DED5"/>
                       </a:solidFill>
                       <a:prstDash val="solid"/>
                     </a:lnB>
                     <a:solidFill>
-                      <a:srgbClr val="F9F3F0"/>
+                      <a:srgbClr val="FBF0EC"/>
                     </a:solidFill>
                   </a:tcPr>
                 </a:tc>
@@ -7497,7 +7772,7 @@
                       <a:r>
                         <a:rPr sz="1400" b="0">
                           <a:solidFill>
-                            <a:srgbClr val="2B2B2B"/>
+                            <a:srgbClr val="26231F"/>
                           </a:solidFill>
                         </a:rPr>
                         <a:t>□</a:t>
@@ -7507,30 +7782,30 @@
                   <a:tcPr anchor="ctr" marL="73152" marR="73152">
                     <a:lnL w="9525" cap="flat" cmpd="sng" algn="ctr">
                       <a:solidFill>
-                        <a:srgbClr val="EFD9D1"/>
+                        <a:srgbClr val="F6DED5"/>
                       </a:solidFill>
                       <a:prstDash val="solid"/>
                     </a:lnL>
                     <a:lnR w="9525" cap="flat" cmpd="sng" algn="ctr">
                       <a:solidFill>
-                        <a:srgbClr val="EFD9D1"/>
+                        <a:srgbClr val="F6DED5"/>
                       </a:solidFill>
                       <a:prstDash val="solid"/>
                     </a:lnR>
                     <a:lnT w="9525" cap="flat" cmpd="sng" algn="ctr">
                       <a:solidFill>
-                        <a:srgbClr val="EFD9D1"/>
+                        <a:srgbClr val="F6DED5"/>
                       </a:solidFill>
                       <a:prstDash val="solid"/>
                     </a:lnT>
                     <a:lnB w="9525" cap="flat" cmpd="sng" algn="ctr">
                       <a:solidFill>
-                        <a:srgbClr val="EFD9D1"/>
+                        <a:srgbClr val="F6DED5"/>
                       </a:solidFill>
                       <a:prstDash val="solid"/>
                     </a:lnB>
                     <a:solidFill>
-                      <a:srgbClr val="F9F3F0"/>
+                      <a:srgbClr val="FBF0EC"/>
                     </a:solidFill>
                   </a:tcPr>
                 </a:tc>
@@ -7543,7 +7818,7 @@
                       <a:r>
                         <a:rPr sz="1400" b="0">
                           <a:solidFill>
-                            <a:srgbClr val="2B2B2B"/>
+                            <a:srgbClr val="26231F"/>
                           </a:solidFill>
                         </a:rPr>
                         <a:t>□</a:t>
@@ -7553,30 +7828,30 @@
                   <a:tcPr anchor="ctr" marL="73152" marR="73152">
                     <a:lnL w="9525" cap="flat" cmpd="sng" algn="ctr">
                       <a:solidFill>
-                        <a:srgbClr val="EFD9D1"/>
+                        <a:srgbClr val="F6DED5"/>
                       </a:solidFill>
                       <a:prstDash val="solid"/>
                     </a:lnL>
                     <a:lnR w="9525" cap="flat" cmpd="sng" algn="ctr">
                       <a:solidFill>
-                        <a:srgbClr val="EFD9D1"/>
+                        <a:srgbClr val="F6DED5"/>
                       </a:solidFill>
                       <a:prstDash val="solid"/>
                     </a:lnR>
                     <a:lnT w="9525" cap="flat" cmpd="sng" algn="ctr">
                       <a:solidFill>
-                        <a:srgbClr val="EFD9D1"/>
+                        <a:srgbClr val="F6DED5"/>
                       </a:solidFill>
                       <a:prstDash val="solid"/>
                     </a:lnT>
                     <a:lnB w="9525" cap="flat" cmpd="sng" algn="ctr">
                       <a:solidFill>
-                        <a:srgbClr val="EFD9D1"/>
+                        <a:srgbClr val="F6DED5"/>
                       </a:solidFill>
                       <a:prstDash val="solid"/>
                     </a:lnB>
                     <a:solidFill>
-                      <a:srgbClr val="F9F3F0"/>
+                      <a:srgbClr val="FBF0EC"/>
                     </a:solidFill>
                   </a:tcPr>
                 </a:tc>
@@ -7599,7 +7874,7 @@
     <p:bg>
       <p:bgPr>
         <a:solidFill>
-          <a:srgbClr val="EFD9D1"/>
+          <a:srgbClr val="F6DED5"/>
         </a:solidFill>
         <a:effectLst/>
       </p:bgPr>
@@ -7619,20 +7894,84 @@
         </p:nvSpPr>
         <p:spPr>
           <a:xfrm>
-            <a:off x="274320" y="274320"/>
-            <a:ext cx="11643055" cy="6309360"/>
+            <a:off x="640080" y="566928"/>
+            <a:ext cx="10911535" cy="10972"/>
           </a:xfrm>
           <a:prstGeom prst="rect">
             <a:avLst/>
           </a:prstGeom>
           <a:solidFill>
-            <a:srgbClr val="FFFFFF"/>
+            <a:srgbClr val="26231F"/>
           </a:solidFill>
-          <a:ln w="25400">
-            <a:solidFill>
-              <a:srgbClr val="7D4531"/>
-            </a:solidFill>
-            <a:prstDash val="dash"/>
+          <a:ln>
+            <a:noFill/>
+          </a:ln>
+        </p:spPr>
+        <p:txBody>
+          <a:bodyPr rtlCol="0" anchor="ctr"/>
+          <a:lstStyle/>
+          <a:p>
+            <a:pPr algn="ctr"/>
+          </a:p>
+        </p:txBody>
+      </p:sp>
+      <p:sp>
+        <p:nvSpPr>
+          <p:cNvPr id="4" name="상단 라벨"/>
+          <p:cNvSpPr txBox="1"/>
+          <p:nvPr/>
+        </p:nvSpPr>
+        <p:spPr>
+          <a:xfrm>
+            <a:off x="640080" y="237744"/>
+            <a:ext cx="5486400" cy="274320"/>
+          </a:xfrm>
+          <a:prstGeom prst="rect">
+            <a:avLst/>
+          </a:prstGeom>
+          <a:noFill/>
+        </p:spPr>
+        <p:txBody>
+          <a:bodyPr wrap="square" lIns="54864" rIns="54864" tIns="27432" bIns="27432" anchor="ctr">
+            <a:noAutofit/>
+          </a:bodyPr>
+          <a:lstStyle/>
+          <a:p>
+            <a:pPr algn="l">
+              <a:lnSpc>
+                <a:spcPct val="115000"/>
+              </a:lnSpc>
+            </a:pPr>
+            <a:r>
+              <a:rPr sz="900" b="1" i="0" spc="250">
+                <a:solidFill>
+                  <a:srgbClr val="26231F"/>
+                </a:solidFill>
+              </a:rPr>
+              <a:t>INSURANCE CHECK</a:t>
+            </a:r>
+          </a:p>
+        </p:txBody>
+      </p:sp>
+      <p:sp>
+        <p:nvSpPr>
+          <p:cNvPr id="5" name="포인트"/>
+          <p:cNvSpPr/>
+          <p:nvPr/>
+        </p:nvSpPr>
+        <p:spPr>
+          <a:xfrm>
+            <a:off x="11204143" y="246888"/>
+            <a:ext cx="237744" cy="237744"/>
+          </a:xfrm>
+          <a:prstGeom prst="moon">
+            <a:avLst/>
+          </a:prstGeom>
+          <a:solidFill>
+            <a:srgbClr val="E1AC98"/>
+          </a:solidFill>
+          <a:ln>
+            <a:noFill/>
           </a:ln>
         </p:spPr>
         <p:txBody>
@@ -7655,8 +7994,8 @@
         </p:nvSpPr>
         <p:spPr>
           <a:xfrm>
-            <a:off x="777240" y="548640"/>
-            <a:ext cx="9357055" cy="822960"/>
+            <a:off x="640080" y="731520"/>
+            <a:ext cx="10911535" cy="822960"/>
           </a:xfrm>
         </p:spPr>
         <p:txBody>
@@ -7673,7 +8012,7 @@
             <a:r>
               <a:rPr sz="3000" b="1" i="0">
                 <a:solidFill>
-                  <a:srgbClr val="3B2017"/>
+                  <a:srgbClr val="26231F"/>
                 </a:solidFill>
               </a:rPr>
               <a:t>월 보험료 한눈에</a:t>
@@ -7683,27 +8022,25 @@
       </p:sp>
       <p:sp>
         <p:nvSpPr>
-          <p:cNvPr id="4" name="카드 1"/>
+          <p:cNvPr id="6" name="카드 1"/>
           <p:cNvSpPr/>
           <p:nvPr/>
         </p:nvSpPr>
         <p:spPr>
           <a:xfrm>
-            <a:off x="777240" y="1554480"/>
-            <a:ext cx="3393338" cy="2926080"/>
+            <a:off x="640080" y="1783080"/>
+            <a:ext cx="3484778" cy="2926080"/>
           </a:xfrm>
           <a:prstGeom prst="roundRect">
             <a:avLst>
-              <a:gd name="adj" fmla="val 8000"/>
+              <a:gd name="adj" fmla="val 7000"/>
             </a:avLst>
           </a:prstGeom>
           <a:solidFill>
-            <a:srgbClr val="F9F3F0"/>
+            <a:srgbClr val="FBF0EC"/>
           </a:solidFill>
-          <a:ln w="15875">
-            <a:solidFill>
-              <a:srgbClr val="EFD9D1"/>
-            </a:solidFill>
+          <a:ln>
+            <a:noFill/>
           </a:ln>
         </p:spPr>
         <p:txBody>
@@ -7716,20 +8053,20 @@
       </p:sp>
       <p:sp>
         <p:nvSpPr>
-          <p:cNvPr id="5" name="번호 1"/>
+          <p:cNvPr id="7" name="번호 1"/>
           <p:cNvSpPr/>
           <p:nvPr/>
         </p:nvSpPr>
         <p:spPr>
           <a:xfrm>
-            <a:off x="960120" y="1737360"/>
+            <a:off x="822959" y="1965960"/>
             <a:ext cx="457200" cy="457200"/>
           </a:xfrm>
           <a:prstGeom prst="ellipse">
             <a:avLst/>
           </a:prstGeom>
           <a:solidFill>
-            <a:srgbClr val="7D4531"/>
+            <a:srgbClr val="E1AC98"/>
           </a:solidFill>
           <a:ln>
             <a:noFill/>
@@ -7749,7 +8086,7 @@
             <a:r>
               <a:rPr sz="1600" b="1" i="0">
                 <a:solidFill>
-                  <a:srgbClr val="FFFFFF"/>
+                  <a:srgbClr val="26231F"/>
                 </a:solidFill>
               </a:rPr>
               <a:t>1</a:t>
@@ -7759,14 +8096,14 @@
       </p:sp>
       <p:sp>
         <p:nvSpPr>
-          <p:cNvPr id="6" name="TextBox 5"/>
+          <p:cNvPr id="8" name="TextBox 7"/>
           <p:cNvSpPr txBox="1"/>
           <p:nvPr/>
         </p:nvSpPr>
         <p:spPr>
           <a:xfrm>
-            <a:off x="914400" y="2331720"/>
-            <a:ext cx="3119018" cy="640080"/>
+            <a:off x="777240" y="2560320"/>
+            <a:ext cx="3210458" cy="640080"/>
           </a:xfrm>
           <a:prstGeom prst="rect">
             <a:avLst/>
@@ -7787,7 +8124,7 @@
             <a:r>
               <a:rPr sz="1700" b="1" i="0">
                 <a:solidFill>
-                  <a:srgbClr val="3B2017"/>
+                  <a:srgbClr val="493027"/>
                 </a:solidFill>
               </a:rPr>
               <a:t>월 보험료 합계</a:t>
@@ -7797,14 +8134,14 @@
       </p:sp>
       <p:sp>
         <p:nvSpPr>
-          <p:cNvPr id="7" name="TextBox 6"/>
+          <p:cNvPr id="9" name="TextBox 8"/>
           <p:cNvSpPr txBox="1"/>
           <p:nvPr/>
         </p:nvSpPr>
         <p:spPr>
           <a:xfrm>
-            <a:off x="914400" y="3017520"/>
-            <a:ext cx="3119018" cy="1325880"/>
+            <a:off x="777240" y="3246120"/>
+            <a:ext cx="3210458" cy="1325880"/>
           </a:xfrm>
           <a:prstGeom prst="rect">
             <a:avLst/>
@@ -7825,7 +8162,7 @@
             <a:r>
               <a:rPr sz="3000" b="0" i="0">
                 <a:solidFill>
-                  <a:srgbClr val="2B2B2B"/>
+                  <a:srgbClr val="26231F"/>
                 </a:solidFill>
               </a:rPr>
               <a:t>0원</a:t>
@@ -7835,27 +8172,25 @@
       </p:sp>
       <p:sp>
         <p:nvSpPr>
-          <p:cNvPr id="8" name="카드 2"/>
+          <p:cNvPr id="10" name="카드 2"/>
           <p:cNvSpPr/>
           <p:nvPr/>
         </p:nvSpPr>
         <p:spPr>
           <a:xfrm>
-            <a:off x="4399178" y="1554480"/>
-            <a:ext cx="3393338" cy="2926080"/>
+            <a:off x="4353458" y="1783080"/>
+            <a:ext cx="3484778" cy="2926080"/>
           </a:xfrm>
           <a:prstGeom prst="roundRect">
             <a:avLst>
-              <a:gd name="adj" fmla="val 8000"/>
+              <a:gd name="adj" fmla="val 7000"/>
             </a:avLst>
           </a:prstGeom>
           <a:solidFill>
-            <a:srgbClr val="F9F3F0"/>
+            <a:srgbClr val="FBF0EC"/>
           </a:solidFill>
-          <a:ln w="15875">
-            <a:solidFill>
-              <a:srgbClr val="EFD9D1"/>
-            </a:solidFill>
+          <a:ln>
+            <a:noFill/>
           </a:ln>
         </p:spPr>
         <p:txBody>
@@ -7868,20 +8203,20 @@
       </p:sp>
       <p:sp>
         <p:nvSpPr>
-          <p:cNvPr id="9" name="번호 2"/>
+          <p:cNvPr id="11" name="번호 2"/>
           <p:cNvSpPr/>
           <p:nvPr/>
         </p:nvSpPr>
         <p:spPr>
           <a:xfrm>
-            <a:off x="4582058" y="1737360"/>
+            <a:off x="4536338" y="1965960"/>
             <a:ext cx="457200" cy="457200"/>
           </a:xfrm>
           <a:prstGeom prst="ellipse">
             <a:avLst/>
           </a:prstGeom>
           <a:solidFill>
-            <a:srgbClr val="7D4531"/>
+            <a:srgbClr val="E1AC98"/>
           </a:solidFill>
           <a:ln>
             <a:noFill/>
@@ -7901,7 +8236,7 @@
             <a:r>
               <a:rPr sz="1600" b="1" i="0">
                 <a:solidFill>
-                  <a:srgbClr val="FFFFFF"/>
+                  <a:srgbClr val="26231F"/>
                 </a:solidFill>
               </a:rPr>
               <a:t>2</a:t>
@@ -7911,14 +8246,14 @@
       </p:sp>
       <p:sp>
         <p:nvSpPr>
-          <p:cNvPr id="10" name="TextBox 9"/>
+          <p:cNvPr id="12" name="TextBox 11"/>
           <p:cNvSpPr txBox="1"/>
           <p:nvPr/>
         </p:nvSpPr>
         <p:spPr>
           <a:xfrm>
-            <a:off x="4536338" y="2331720"/>
-            <a:ext cx="3119018" cy="640080"/>
+            <a:off x="4490618" y="2560320"/>
+            <a:ext cx="3210458" cy="640080"/>
           </a:xfrm>
           <a:prstGeom prst="rect">
             <a:avLst/>
@@ -7939,7 +8274,7 @@
             <a:r>
               <a:rPr sz="1700" b="1" i="0">
                 <a:solidFill>
-                  <a:srgbClr val="3B2017"/>
+                  <a:srgbClr val="493027"/>
                 </a:solidFill>
               </a:rPr>
               <a:t>연 보험료 합계</a:t>
@@ -7949,14 +8284,14 @@
       </p:sp>
       <p:sp>
         <p:nvSpPr>
-          <p:cNvPr id="11" name="TextBox 10"/>
+          <p:cNvPr id="13" name="TextBox 12"/>
           <p:cNvSpPr txBox="1"/>
           <p:nvPr/>
         </p:nvSpPr>
         <p:spPr>
           <a:xfrm>
-            <a:off x="4536338" y="3017520"/>
-            <a:ext cx="3119018" cy="1325880"/>
+            <a:off x="4490618" y="3246120"/>
+            <a:ext cx="3210458" cy="1325880"/>
           </a:xfrm>
           <a:prstGeom prst="rect">
             <a:avLst/>
@@ -7977,7 +8312,7 @@
             <a:r>
               <a:rPr sz="3000" b="0" i="0">
                 <a:solidFill>
-                  <a:srgbClr val="2B2B2B"/>
+                  <a:srgbClr val="26231F"/>
                 </a:solidFill>
               </a:rPr>
               <a:t>0원</a:t>
@@ -7987,27 +8322,25 @@
       </p:sp>
       <p:sp>
         <p:nvSpPr>
-          <p:cNvPr id="12" name="카드 3"/>
+          <p:cNvPr id="14" name="카드 3"/>
           <p:cNvSpPr/>
           <p:nvPr/>
         </p:nvSpPr>
         <p:spPr>
           <a:xfrm>
-            <a:off x="8021116" y="1554480"/>
-            <a:ext cx="3393338" cy="2926080"/>
+            <a:off x="8066836" y="1783080"/>
+            <a:ext cx="3484778" cy="2926080"/>
           </a:xfrm>
           <a:prstGeom prst="roundRect">
             <a:avLst>
-              <a:gd name="adj" fmla="val 8000"/>
+              <a:gd name="adj" fmla="val 7000"/>
             </a:avLst>
           </a:prstGeom>
           <a:solidFill>
-            <a:srgbClr val="F9F3F0"/>
+            <a:srgbClr val="FBF0EC"/>
           </a:solidFill>
-          <a:ln w="15875">
-            <a:solidFill>
-              <a:srgbClr val="EFD9D1"/>
-            </a:solidFill>
+          <a:ln>
+            <a:noFill/>
           </a:ln>
         </p:spPr>
         <p:txBody>
@@ -8020,20 +8353,20 @@
       </p:sp>
       <p:sp>
         <p:nvSpPr>
-          <p:cNvPr id="13" name="번호 3"/>
+          <p:cNvPr id="15" name="번호 3"/>
           <p:cNvSpPr/>
           <p:nvPr/>
         </p:nvSpPr>
         <p:spPr>
           <a:xfrm>
-            <a:off x="8203996" y="1737360"/>
+            <a:off x="8249716" y="1965960"/>
             <a:ext cx="457200" cy="457200"/>
           </a:xfrm>
           <a:prstGeom prst="ellipse">
             <a:avLst/>
           </a:prstGeom>
           <a:solidFill>
-            <a:srgbClr val="7D4531"/>
+            <a:srgbClr val="E1AC98"/>
           </a:solidFill>
           <a:ln>
             <a:noFill/>
@@ -8053,7 +8386,7 @@
             <a:r>
               <a:rPr sz="1600" b="1" i="0">
                 <a:solidFill>
-                  <a:srgbClr val="FFFFFF"/>
+                  <a:srgbClr val="26231F"/>
                 </a:solidFill>
               </a:rPr>
               <a:t>3</a:t>
@@ -8063,14 +8396,14 @@
       </p:sp>
       <p:sp>
         <p:nvSpPr>
-          <p:cNvPr id="14" name="TextBox 13"/>
+          <p:cNvPr id="16" name="TextBox 15"/>
           <p:cNvSpPr txBox="1"/>
           <p:nvPr/>
         </p:nvSpPr>
         <p:spPr>
           <a:xfrm>
-            <a:off x="8158276" y="2331720"/>
-            <a:ext cx="3119018" cy="640080"/>
+            <a:off x="8203996" y="2560320"/>
+            <a:ext cx="3210458" cy="640080"/>
           </a:xfrm>
           <a:prstGeom prst="rect">
             <a:avLst/>
@@ -8091,7 +8424,7 @@
             <a:r>
               <a:rPr sz="1700" b="1" i="0">
                 <a:solidFill>
-                  <a:srgbClr val="3B2017"/>
+                  <a:srgbClr val="493027"/>
                 </a:solidFill>
               </a:rPr>
               <a:t>월 소득 대비</a:t>
@@ -8101,14 +8434,14 @@
       </p:sp>
       <p:sp>
         <p:nvSpPr>
-          <p:cNvPr id="15" name="TextBox 14"/>
+          <p:cNvPr id="17" name="TextBox 16"/>
           <p:cNvSpPr txBox="1"/>
           <p:nvPr/>
         </p:nvSpPr>
         <p:spPr>
           <a:xfrm>
-            <a:off x="8158276" y="3017520"/>
-            <a:ext cx="3119018" cy="1325880"/>
+            <a:off x="8203996" y="3246120"/>
+            <a:ext cx="3210458" cy="1325880"/>
           </a:xfrm>
           <a:prstGeom prst="rect">
             <a:avLst/>
@@ -8129,7 +8462,7 @@
             <a:r>
               <a:rPr sz="3000" b="0" i="0">
                 <a:solidFill>
-                  <a:srgbClr val="2B2B2B"/>
+                  <a:srgbClr val="26231F"/>
                 </a:solidFill>
               </a:rPr>
               <a:t>0 %</a:t>
@@ -8139,14 +8472,14 @@
       </p:sp>
       <p:sp>
         <p:nvSpPr>
-          <p:cNvPr id="16" name="안내"/>
+          <p:cNvPr id="18" name="안내"/>
           <p:cNvSpPr txBox="1"/>
           <p:nvPr/>
         </p:nvSpPr>
         <p:spPr>
           <a:xfrm>
-            <a:off x="777240" y="4663440"/>
-            <a:ext cx="10637215" cy="365760"/>
+            <a:off x="640080" y="4892040"/>
+            <a:ext cx="10911535" cy="365760"/>
           </a:xfrm>
           <a:prstGeom prst="rect">
             <a:avLst/>
@@ -8189,7 +8522,7 @@
     <p:bg>
       <p:bgPr>
         <a:solidFill>
-          <a:srgbClr val="EFD9D1"/>
+          <a:srgbClr val="F6DED5"/>
         </a:solidFill>
         <a:effectLst/>
       </p:bgPr>
@@ -8209,20 +8542,84 @@
         </p:nvSpPr>
         <p:spPr>
           <a:xfrm>
-            <a:off x="274320" y="274320"/>
-            <a:ext cx="11643055" cy="6309360"/>
+            <a:off x="640080" y="566928"/>
+            <a:ext cx="10911535" cy="10972"/>
           </a:xfrm>
           <a:prstGeom prst="rect">
             <a:avLst/>
           </a:prstGeom>
           <a:solidFill>
-            <a:srgbClr val="FFFFFF"/>
+            <a:srgbClr val="26231F"/>
           </a:solidFill>
-          <a:ln w="25400">
-            <a:solidFill>
-              <a:srgbClr val="7D4531"/>
-            </a:solidFill>
-            <a:prstDash val="dash"/>
+          <a:ln>
+            <a:noFill/>
+          </a:ln>
+        </p:spPr>
+        <p:txBody>
+          <a:bodyPr rtlCol="0" anchor="ctr"/>
+          <a:lstStyle/>
+          <a:p>
+            <a:pPr algn="ctr"/>
+          </a:p>
+        </p:txBody>
+      </p:sp>
+      <p:sp>
+        <p:nvSpPr>
+          <p:cNvPr id="4" name="상단 라벨"/>
+          <p:cNvSpPr txBox="1"/>
+          <p:nvPr/>
+        </p:nvSpPr>
+        <p:spPr>
+          <a:xfrm>
+            <a:off x="640080" y="237744"/>
+            <a:ext cx="5486400" cy="274320"/>
+          </a:xfrm>
+          <a:prstGeom prst="rect">
+            <a:avLst/>
+          </a:prstGeom>
+          <a:noFill/>
+        </p:spPr>
+        <p:txBody>
+          <a:bodyPr wrap="square" lIns="54864" rIns="54864" tIns="27432" bIns="27432" anchor="ctr">
+            <a:noAutofit/>
+          </a:bodyPr>
+          <a:lstStyle/>
+          <a:p>
+            <a:pPr algn="l">
+              <a:lnSpc>
+                <a:spcPct val="115000"/>
+              </a:lnSpc>
+            </a:pPr>
+            <a:r>
+              <a:rPr sz="900" b="1" i="0" spc="250">
+                <a:solidFill>
+                  <a:srgbClr val="26231F"/>
+                </a:solidFill>
+              </a:rPr>
+              <a:t>INSURANCE CHECK</a:t>
+            </a:r>
+          </a:p>
+        </p:txBody>
+      </p:sp>
+      <p:sp>
+        <p:nvSpPr>
+          <p:cNvPr id="5" name="포인트"/>
+          <p:cNvSpPr/>
+          <p:nvPr/>
+        </p:nvSpPr>
+        <p:spPr>
+          <a:xfrm>
+            <a:off x="11204143" y="246888"/>
+            <a:ext cx="237744" cy="237744"/>
+          </a:xfrm>
+          <a:prstGeom prst="moon">
+            <a:avLst/>
+          </a:prstGeom>
+          <a:solidFill>
+            <a:srgbClr val="E1AC98"/>
+          </a:solidFill>
+          <a:ln>
+            <a:noFill/>
           </a:ln>
         </p:spPr>
         <p:txBody>
@@ -8245,8 +8642,8 @@
         </p:nvSpPr>
         <p:spPr>
           <a:xfrm>
-            <a:off x="777240" y="548640"/>
-            <a:ext cx="9357055" cy="822960"/>
+            <a:off x="640080" y="731520"/>
+            <a:ext cx="10911535" cy="822960"/>
           </a:xfrm>
         </p:spPr>
         <p:txBody>
@@ -8263,7 +8660,7 @@
             <a:r>
               <a:rPr sz="3000" b="1" i="0">
                 <a:solidFill>
-                  <a:srgbClr val="3B2017"/>
+                  <a:srgbClr val="26231F"/>
                 </a:solidFill>
               </a:rPr>
               <a:t>점검 메모와 다음 할 일</a:t>
@@ -8273,27 +8670,25 @@
       </p:sp>
       <p:sp>
         <p:nvSpPr>
-          <p:cNvPr id="4" name="카드 1"/>
+          <p:cNvPr id="6" name="카드 1"/>
           <p:cNvSpPr/>
           <p:nvPr/>
         </p:nvSpPr>
         <p:spPr>
           <a:xfrm>
-            <a:off x="777240" y="1554480"/>
-            <a:ext cx="3393338" cy="4023359"/>
+            <a:off x="640080" y="1783080"/>
+            <a:ext cx="3484778" cy="3931920"/>
           </a:xfrm>
           <a:prstGeom prst="roundRect">
             <a:avLst>
-              <a:gd name="adj" fmla="val 8000"/>
+              <a:gd name="adj" fmla="val 7000"/>
             </a:avLst>
           </a:prstGeom>
           <a:solidFill>
-            <a:srgbClr val="F9F3F0"/>
+            <a:srgbClr val="FBF0EC"/>
           </a:solidFill>
-          <a:ln w="15875">
-            <a:solidFill>
-              <a:srgbClr val="EFD9D1"/>
-            </a:solidFill>
+          <a:ln>
+            <a:noFill/>
           </a:ln>
         </p:spPr>
         <p:txBody>
@@ -8306,20 +8701,20 @@
       </p:sp>
       <p:sp>
         <p:nvSpPr>
-          <p:cNvPr id="5" name="번호 1"/>
+          <p:cNvPr id="7" name="번호 1"/>
           <p:cNvSpPr/>
           <p:nvPr/>
         </p:nvSpPr>
         <p:spPr>
           <a:xfrm>
-            <a:off x="960120" y="1737360"/>
+            <a:off x="822959" y="1965960"/>
             <a:ext cx="457200" cy="457200"/>
           </a:xfrm>
           <a:prstGeom prst="ellipse">
             <a:avLst/>
           </a:prstGeom>
           <a:solidFill>
-            <a:srgbClr val="7D4531"/>
+            <a:srgbClr val="E1AC98"/>
           </a:solidFill>
           <a:ln>
             <a:noFill/>
@@ -8339,7 +8734,7 @@
             <a:r>
               <a:rPr sz="1600" b="1" i="0">
                 <a:solidFill>
-                  <a:srgbClr val="FFFFFF"/>
+                  <a:srgbClr val="26231F"/>
                 </a:solidFill>
               </a:rPr>
               <a:t>1</a:t>
@@ -8349,14 +8744,14 @@
       </p:sp>
       <p:sp>
         <p:nvSpPr>
-          <p:cNvPr id="6" name="TextBox 5"/>
+          <p:cNvPr id="8" name="TextBox 7"/>
           <p:cNvSpPr txBox="1"/>
           <p:nvPr/>
         </p:nvSpPr>
         <p:spPr>
           <a:xfrm>
-            <a:off x="914400" y="2331720"/>
-            <a:ext cx="3119018" cy="640080"/>
+            <a:off x="777240" y="2560320"/>
+            <a:ext cx="3210458" cy="640080"/>
           </a:xfrm>
           <a:prstGeom prst="rect">
             <a:avLst/>
@@ -8377,7 +8772,7 @@
             <a:r>
               <a:rPr sz="1800" b="1" i="0">
                 <a:solidFill>
-                  <a:srgbClr val="3B2017"/>
+                  <a:srgbClr val="493027"/>
                 </a:solidFill>
               </a:rPr>
               <a:t>확인할 것</a:t>
@@ -8387,14 +8782,14 @@
       </p:sp>
       <p:sp>
         <p:nvSpPr>
-          <p:cNvPr id="7" name="TextBox 6"/>
+          <p:cNvPr id="9" name="TextBox 8"/>
           <p:cNvSpPr txBox="1"/>
           <p:nvPr/>
         </p:nvSpPr>
         <p:spPr>
           <a:xfrm>
-            <a:off x="914400" y="3017520"/>
-            <a:ext cx="3119018" cy="2423159"/>
+            <a:off x="777240" y="3246120"/>
+            <a:ext cx="3210458" cy="2331720"/>
           </a:xfrm>
           <a:prstGeom prst="rect">
             <a:avLst/>
@@ -8415,7 +8810,7 @@
             <a:r>
               <a:rPr sz="1500" b="0" i="0">
                 <a:solidFill>
-                  <a:srgbClr val="2B2B2B"/>
+                  <a:srgbClr val="26231F"/>
                 </a:solidFill>
               </a:rPr>
               <a:t>내용을 입력하세요</a:t>
@@ -8425,27 +8820,25 @@
       </p:sp>
       <p:sp>
         <p:nvSpPr>
-          <p:cNvPr id="8" name="카드 2"/>
+          <p:cNvPr id="10" name="카드 2"/>
           <p:cNvSpPr/>
           <p:nvPr/>
         </p:nvSpPr>
         <p:spPr>
           <a:xfrm>
-            <a:off x="4399178" y="1554480"/>
-            <a:ext cx="3393338" cy="4023359"/>
+            <a:off x="4353458" y="1783080"/>
+            <a:ext cx="3484778" cy="3931920"/>
           </a:xfrm>
           <a:prstGeom prst="roundRect">
             <a:avLst>
-              <a:gd name="adj" fmla="val 8000"/>
+              <a:gd name="adj" fmla="val 7000"/>
             </a:avLst>
           </a:prstGeom>
           <a:solidFill>
-            <a:srgbClr val="F9F3F0"/>
+            <a:srgbClr val="FBF0EC"/>
           </a:solidFill>
-          <a:ln w="15875">
-            <a:solidFill>
-              <a:srgbClr val="EFD9D1"/>
-            </a:solidFill>
+          <a:ln>
+            <a:noFill/>
           </a:ln>
         </p:spPr>
         <p:txBody>
@@ -8458,20 +8851,20 @@
       </p:sp>
       <p:sp>
         <p:nvSpPr>
-          <p:cNvPr id="9" name="번호 2"/>
+          <p:cNvPr id="11" name="번호 2"/>
           <p:cNvSpPr/>
           <p:nvPr/>
         </p:nvSpPr>
         <p:spPr>
           <a:xfrm>
-            <a:off x="4582058" y="1737360"/>
+            <a:off x="4536338" y="1965960"/>
             <a:ext cx="457200" cy="457200"/>
           </a:xfrm>
           <a:prstGeom prst="ellipse">
             <a:avLst/>
           </a:prstGeom>
           <a:solidFill>
-            <a:srgbClr val="7D4531"/>
+            <a:srgbClr val="E1AC98"/>
           </a:solidFill>
           <a:ln>
             <a:noFill/>
@@ -8491,7 +8884,7 @@
             <a:r>
               <a:rPr sz="1600" b="1" i="0">
                 <a:solidFill>
-                  <a:srgbClr val="FFFFFF"/>
+                  <a:srgbClr val="26231F"/>
                 </a:solidFill>
               </a:rPr>
               <a:t>2</a:t>
@@ -8501,14 +8894,14 @@
       </p:sp>
       <p:sp>
         <p:nvSpPr>
-          <p:cNvPr id="10" name="TextBox 9"/>
+          <p:cNvPr id="12" name="TextBox 11"/>
           <p:cNvSpPr txBox="1"/>
           <p:nvPr/>
         </p:nvSpPr>
         <p:spPr>
           <a:xfrm>
-            <a:off x="4536338" y="2331720"/>
-            <a:ext cx="3119018" cy="640080"/>
+            <a:off x="4490618" y="2560320"/>
+            <a:ext cx="3210458" cy="640080"/>
           </a:xfrm>
           <a:prstGeom prst="rect">
             <a:avLst/>
@@ -8529,7 +8922,7 @@
             <a:r>
               <a:rPr sz="1800" b="1" i="0">
                 <a:solidFill>
-                  <a:srgbClr val="3B2017"/>
+                  <a:srgbClr val="493027"/>
                 </a:solidFill>
               </a:rPr>
               <a:t>문의할 것</a:t>
@@ -8539,14 +8932,14 @@
       </p:sp>
       <p:sp>
         <p:nvSpPr>
-          <p:cNvPr id="11" name="TextBox 10"/>
+          <p:cNvPr id="13" name="TextBox 12"/>
           <p:cNvSpPr txBox="1"/>
           <p:nvPr/>
         </p:nvSpPr>
         <p:spPr>
           <a:xfrm>
-            <a:off x="4536338" y="3017520"/>
-            <a:ext cx="3119018" cy="2423159"/>
+            <a:off x="4490618" y="3246120"/>
+            <a:ext cx="3210458" cy="2331720"/>
           </a:xfrm>
           <a:prstGeom prst="rect">
             <a:avLst/>
@@ -8567,7 +8960,7 @@
             <a:r>
               <a:rPr sz="1500" b="0" i="0">
                 <a:solidFill>
-                  <a:srgbClr val="2B2B2B"/>
+                  <a:srgbClr val="26231F"/>
                 </a:solidFill>
               </a:rPr>
               <a:t>내용을 입력하세요</a:t>
@@ -8577,27 +8970,25 @@
       </p:sp>
       <p:sp>
         <p:nvSpPr>
-          <p:cNvPr id="12" name="카드 3"/>
+          <p:cNvPr id="14" name="카드 3"/>
           <p:cNvSpPr/>
           <p:nvPr/>
         </p:nvSpPr>
         <p:spPr>
           <a:xfrm>
-            <a:off x="8021116" y="1554480"/>
-            <a:ext cx="3393338" cy="4023359"/>
+            <a:off x="8066836" y="1783080"/>
+            <a:ext cx="3484778" cy="3931920"/>
           </a:xfrm>
           <a:prstGeom prst="roundRect">
             <a:avLst>
-              <a:gd name="adj" fmla="val 8000"/>
+              <a:gd name="adj" fmla="val 7000"/>
             </a:avLst>
           </a:prstGeom>
           <a:solidFill>
-            <a:srgbClr val="F9F3F0"/>
+            <a:srgbClr val="FBF0EC"/>
           </a:solidFill>
-          <a:ln w="15875">
-            <a:solidFill>
-              <a:srgbClr val="EFD9D1"/>
-            </a:solidFill>
+          <a:ln>
+            <a:noFill/>
           </a:ln>
         </p:spPr>
         <p:txBody>
@@ -8610,20 +9001,20 @@
       </p:sp>
       <p:sp>
         <p:nvSpPr>
-          <p:cNvPr id="13" name="번호 3"/>
+          <p:cNvPr id="15" name="번호 3"/>
           <p:cNvSpPr/>
           <p:nvPr/>
         </p:nvSpPr>
         <p:spPr>
           <a:xfrm>
-            <a:off x="8203996" y="1737360"/>
+            <a:off x="8249716" y="1965960"/>
             <a:ext cx="457200" cy="457200"/>
           </a:xfrm>
           <a:prstGeom prst="ellipse">
             <a:avLst/>
           </a:prstGeom>
           <a:solidFill>
-            <a:srgbClr val="7D4531"/>
+            <a:srgbClr val="E1AC98"/>
           </a:solidFill>
           <a:ln>
             <a:noFill/>
@@ -8643,7 +9034,7 @@
             <a:r>
               <a:rPr sz="1600" b="1" i="0">
                 <a:solidFill>
-                  <a:srgbClr val="FFFFFF"/>
+                  <a:srgbClr val="26231F"/>
                 </a:solidFill>
               </a:rPr>
               <a:t>3</a:t>
@@ -8653,14 +9044,14 @@
       </p:sp>
       <p:sp>
         <p:nvSpPr>
-          <p:cNvPr id="14" name="TextBox 13"/>
+          <p:cNvPr id="16" name="TextBox 15"/>
           <p:cNvSpPr txBox="1"/>
           <p:nvPr/>
         </p:nvSpPr>
         <p:spPr>
           <a:xfrm>
-            <a:off x="8158276" y="2331720"/>
-            <a:ext cx="3119018" cy="640080"/>
+            <a:off x="8203996" y="2560320"/>
+            <a:ext cx="3210458" cy="640080"/>
           </a:xfrm>
           <a:prstGeom prst="rect">
             <a:avLst/>
@@ -8681,7 +9072,7 @@
             <a:r>
               <a:rPr sz="1800" b="1" i="0">
                 <a:solidFill>
-                  <a:srgbClr val="3B2017"/>
+                  <a:srgbClr val="493027"/>
                 </a:solidFill>
               </a:rPr>
               <a:t>정리할 날짜</a:t>
@@ -8691,14 +9082,14 @@
       </p:sp>
       <p:sp>
         <p:nvSpPr>
-          <p:cNvPr id="15" name="TextBox 14"/>
+          <p:cNvPr id="17" name="TextBox 16"/>
           <p:cNvSpPr txBox="1"/>
           <p:nvPr/>
         </p:nvSpPr>
         <p:spPr>
           <a:xfrm>
-            <a:off x="8158276" y="3017520"/>
-            <a:ext cx="3119018" cy="2423159"/>
+            <a:off x="8203996" y="3246120"/>
+            <a:ext cx="3210458" cy="2331720"/>
           </a:xfrm>
           <a:prstGeom prst="rect">
             <a:avLst/>
@@ -8719,7 +9110,7 @@
             <a:r>
               <a:rPr sz="1500" b="0" i="0">
                 <a:solidFill>
-                  <a:srgbClr val="2B2B2B"/>
+                  <a:srgbClr val="26231F"/>
                 </a:solidFill>
               </a:rPr>
               <a:t>내용을 입력하세요</a:t>
@@ -8729,14 +9120,14 @@
       </p:sp>
       <p:sp>
         <p:nvSpPr>
-          <p:cNvPr id="16" name="안내 문구"/>
+          <p:cNvPr id="18" name="안내 문구"/>
           <p:cNvSpPr txBox="1"/>
           <p:nvPr/>
         </p:nvSpPr>
         <p:spPr>
           <a:xfrm>
-            <a:off x="777240" y="5669280"/>
-            <a:ext cx="10637215" cy="548640"/>
+            <a:off x="640080" y="5806440"/>
+            <a:ext cx="10911535" cy="548640"/>
           </a:xfrm>
           <a:prstGeom prst="rect">
             <a:avLst/>
@@ -8784,34 +9175,34 @@
         <a:sysClr val="window" lastClr="FFFFFF"/>
       </a:lt1>
       <a:dk2>
-        <a:srgbClr val="3B2017"/>
+        <a:srgbClr val="493027"/>
       </a:dk2>
       <a:lt2>
-        <a:srgbClr val="F9F3F0"/>
+        <a:srgbClr val="FBF0EC"/>
       </a:lt2>
       <a:accent1>
-        <a:srgbClr val="7D4531"/>
+        <a:srgbClr val="E1AC98"/>
       </a:accent1>
       <a:accent2>
-        <a:srgbClr val="3B917D"/>
+        <a:srgbClr val="EADDB8"/>
       </a:accent2>
       <a:accent3>
-        <a:srgbClr val="3B2017"/>
+        <a:srgbClr val="493027"/>
       </a:accent3>
       <a:accent4>
-        <a:srgbClr val="EFD9D1"/>
+        <a:srgbClr val="F6DED5"/>
       </a:accent4>
       <a:accent5>
-        <a:srgbClr val="5C6B57"/>
+        <a:srgbClr val="E6C4A8"/>
       </a:accent5>
       <a:accent6>
-        <a:srgbClr val="897974"/>
+        <a:srgbClr val="92837D"/>
       </a:accent6>
       <a:hlink>
-        <a:srgbClr val="7D4531"/>
+        <a:srgbClr val="E1AC98"/>
       </a:hlink>
       <a:folHlink>
-        <a:srgbClr val="3B2017"/>
+        <a:srgbClr val="493027"/>
       </a:folHlink>
     </a:clrScheme>
     <a:fontScheme name="Office">
